--- a/Pregrado/Trabajo de grado 3/Clases/Sesion 06 - Comunidades de práctica y co-creación/Presentacion.pptx
+++ b/Pregrado/Trabajo de grado 3/Clases/Sesion 06 - Comunidades de práctica y co-creación/Presentacion.pptx
@@ -3367,41 +3367,6 @@
           </a:p>
         </p:txBody>
       </p:sp>
-      <p:sp>
-        <p:nvSpPr>
-          <p:cNvPr id="7" name="TextBox 6"/>
-          <p:cNvSpPr txBox="1"/>
-          <p:nvPr/>
-        </p:nvSpPr>
-        <p:spPr>
-          <a:xfrm>
-            <a:off x="2194560" y="6446520"/>
-            <a:ext cx="5943600" cy="274320"/>
-          </a:xfrm>
-          <a:prstGeom prst="rect">
-            <a:avLst/>
-          </a:prstGeom>
-          <a:noFill/>
-        </p:spPr>
-        <p:txBody>
-          <a:bodyPr wrap="square" anchor="t" lIns="0" rIns="0" tIns="0" bIns="0">
-            <a:spAutoFit/>
-          </a:bodyPr>
-          <a:lstStyle/>
-          <a:p>
-            <a:pPr algn="l"/>
-            <a:r>
-              <a:rPr sz="1000" b="1" i="0">
-                <a:solidFill>
-                  <a:srgbClr val="8F989D"/>
-                </a:solidFill>
-                <a:latin typeface="Calibri"/>
-              </a:rPr>
-              <a:t>Inicio 5:10 pm</a:t>
-            </a:r>
-          </a:p>
-        </p:txBody>
-      </p:sp>
     </p:spTree>
   </p:cSld>
   <p:clrMapOvr>
@@ -3758,41 +3723,6 @@
         </p:nvSpPr>
         <p:spPr>
           <a:xfrm>
-            <a:off x="2194560" y="6446520"/>
-            <a:ext cx="5943600" cy="274320"/>
-          </a:xfrm>
-          <a:prstGeom prst="rect">
-            <a:avLst/>
-          </a:prstGeom>
-          <a:noFill/>
-        </p:spPr>
-        <p:txBody>
-          <a:bodyPr wrap="square" anchor="t" lIns="0" rIns="0" tIns="0" bIns="0">
-            <a:spAutoFit/>
-          </a:bodyPr>
-          <a:lstStyle/>
-          <a:p>
-            <a:pPr algn="l"/>
-            <a:r>
-              <a:rPr sz="1000" b="1" i="0">
-                <a:solidFill>
-                  <a:srgbClr val="8F989D"/>
-                </a:solidFill>
-                <a:latin typeface="Calibri"/>
-              </a:rPr>
-              <a:t>Inicio 5:10 pm</a:t>
-            </a:r>
-          </a:p>
-        </p:txBody>
-      </p:sp>
-      <p:sp>
-        <p:nvSpPr>
-          <p:cNvPr id="6" name="TextBox 5"/>
-          <p:cNvSpPr txBox="1"/>
-          <p:nvPr/>
-        </p:nvSpPr>
-        <p:spPr>
-          <a:xfrm>
             <a:off x="11094415" y="6446520"/>
             <a:ext cx="548640" cy="274320"/>
           </a:xfrm>
@@ -4051,41 +3981,6 @@
       <p:sp>
         <p:nvSpPr>
           <p:cNvPr id="5" name="TextBox 4"/>
-          <p:cNvSpPr txBox="1"/>
-          <p:nvPr/>
-        </p:nvSpPr>
-        <p:spPr>
-          <a:xfrm>
-            <a:off x="2194560" y="6446520"/>
-            <a:ext cx="5943600" cy="274320"/>
-          </a:xfrm>
-          <a:prstGeom prst="rect">
-            <a:avLst/>
-          </a:prstGeom>
-          <a:noFill/>
-        </p:spPr>
-        <p:txBody>
-          <a:bodyPr wrap="square" anchor="t" lIns="0" rIns="0" tIns="0" bIns="0">
-            <a:spAutoFit/>
-          </a:bodyPr>
-          <a:lstStyle/>
-          <a:p>
-            <a:pPr algn="l"/>
-            <a:r>
-              <a:rPr sz="1000" b="1" i="0">
-                <a:solidFill>
-                  <a:srgbClr val="8F989D"/>
-                </a:solidFill>
-                <a:latin typeface="Calibri"/>
-              </a:rPr>
-              <a:t>Inicio 5:10 pm</a:t>
-            </a:r>
-          </a:p>
-        </p:txBody>
-      </p:sp>
-      <p:sp>
-        <p:nvSpPr>
-          <p:cNvPr id="6" name="TextBox 5"/>
           <p:cNvSpPr txBox="1"/>
           <p:nvPr/>
         </p:nvSpPr>
@@ -4687,41 +4582,6 @@
         </p:nvSpPr>
         <p:spPr>
           <a:xfrm>
-            <a:off x="2194560" y="6446520"/>
-            <a:ext cx="5943600" cy="274320"/>
-          </a:xfrm>
-          <a:prstGeom prst="rect">
-            <a:avLst/>
-          </a:prstGeom>
-          <a:noFill/>
-        </p:spPr>
-        <p:txBody>
-          <a:bodyPr wrap="square" anchor="t" lIns="0" rIns="0" tIns="0" bIns="0">
-            <a:spAutoFit/>
-          </a:bodyPr>
-          <a:lstStyle/>
-          <a:p>
-            <a:pPr algn="l"/>
-            <a:r>
-              <a:rPr sz="1000" b="1" i="0">
-                <a:solidFill>
-                  <a:srgbClr val="8F989D"/>
-                </a:solidFill>
-                <a:latin typeface="Calibri"/>
-              </a:rPr>
-              <a:t>Inicio 5:10 pm</a:t>
-            </a:r>
-          </a:p>
-        </p:txBody>
-      </p:sp>
-      <p:sp>
-        <p:nvSpPr>
-          <p:cNvPr id="7" name="TextBox 6"/>
-          <p:cNvSpPr txBox="1"/>
-          <p:nvPr/>
-        </p:nvSpPr>
-        <p:spPr>
-          <a:xfrm>
             <a:off x="11094415" y="6446520"/>
             <a:ext cx="548640" cy="274320"/>
           </a:xfrm>
@@ -5153,41 +5013,6 @@
         </p:nvSpPr>
         <p:spPr>
           <a:xfrm>
-            <a:off x="2194560" y="6446520"/>
-            <a:ext cx="5943600" cy="274320"/>
-          </a:xfrm>
-          <a:prstGeom prst="rect">
-            <a:avLst/>
-          </a:prstGeom>
-          <a:noFill/>
-        </p:spPr>
-        <p:txBody>
-          <a:bodyPr wrap="square" anchor="t" lIns="0" rIns="0" tIns="0" bIns="0">
-            <a:spAutoFit/>
-          </a:bodyPr>
-          <a:lstStyle/>
-          <a:p>
-            <a:pPr algn="l"/>
-            <a:r>
-              <a:rPr sz="1000" b="1" i="0">
-                <a:solidFill>
-                  <a:srgbClr val="8F989D"/>
-                </a:solidFill>
-                <a:latin typeface="Calibri"/>
-              </a:rPr>
-              <a:t>Inicio 5:10 pm</a:t>
-            </a:r>
-          </a:p>
-        </p:txBody>
-      </p:sp>
-      <p:sp>
-        <p:nvSpPr>
-          <p:cNvPr id="11" name="TextBox 10"/>
-          <p:cNvSpPr txBox="1"/>
-          <p:nvPr/>
-        </p:nvSpPr>
-        <p:spPr>
-          <a:xfrm>
             <a:off x="11094415" y="6446520"/>
             <a:ext cx="548640" cy="274320"/>
           </a:xfrm>
@@ -5516,41 +5341,6 @@
         </p:nvSpPr>
         <p:spPr>
           <a:xfrm>
-            <a:off x="2194560" y="6446520"/>
-            <a:ext cx="5943600" cy="274320"/>
-          </a:xfrm>
-          <a:prstGeom prst="rect">
-            <a:avLst/>
-          </a:prstGeom>
-          <a:noFill/>
-        </p:spPr>
-        <p:txBody>
-          <a:bodyPr wrap="square" anchor="t" lIns="0" rIns="0" tIns="0" bIns="0">
-            <a:spAutoFit/>
-          </a:bodyPr>
-          <a:lstStyle/>
-          <a:p>
-            <a:pPr algn="l"/>
-            <a:r>
-              <a:rPr sz="1000" b="1" i="0">
-                <a:solidFill>
-                  <a:srgbClr val="8F989D"/>
-                </a:solidFill>
-                <a:latin typeface="Calibri"/>
-              </a:rPr>
-              <a:t>Inicio 5:10 pm</a:t>
-            </a:r>
-          </a:p>
-        </p:txBody>
-      </p:sp>
-      <p:sp>
-        <p:nvSpPr>
-          <p:cNvPr id="9" name="TextBox 8"/>
-          <p:cNvSpPr txBox="1"/>
-          <p:nvPr/>
-        </p:nvSpPr>
-        <p:spPr>
-          <a:xfrm>
             <a:off x="11094415" y="6446520"/>
             <a:ext cx="548640" cy="274320"/>
           </a:xfrm>
@@ -6128,41 +5918,6 @@
         </p:nvSpPr>
         <p:spPr>
           <a:xfrm>
-            <a:off x="2194560" y="6446520"/>
-            <a:ext cx="5943600" cy="274320"/>
-          </a:xfrm>
-          <a:prstGeom prst="rect">
-            <a:avLst/>
-          </a:prstGeom>
-          <a:noFill/>
-        </p:spPr>
-        <p:txBody>
-          <a:bodyPr wrap="square" anchor="t" lIns="0" rIns="0" tIns="0" bIns="0">
-            <a:spAutoFit/>
-          </a:bodyPr>
-          <a:lstStyle/>
-          <a:p>
-            <a:pPr algn="l"/>
-            <a:r>
-              <a:rPr sz="1000" b="1" i="0">
-                <a:solidFill>
-                  <a:srgbClr val="8F989D"/>
-                </a:solidFill>
-                <a:latin typeface="Calibri"/>
-              </a:rPr>
-              <a:t>Inicio 5:10 pm</a:t>
-            </a:r>
-          </a:p>
-        </p:txBody>
-      </p:sp>
-      <p:sp>
-        <p:nvSpPr>
-          <p:cNvPr id="6" name="TextBox 5"/>
-          <p:cNvSpPr txBox="1"/>
-          <p:nvPr/>
-        </p:nvSpPr>
-        <p:spPr>
-          <a:xfrm>
             <a:off x="11094415" y="6446520"/>
             <a:ext cx="548640" cy="274320"/>
           </a:xfrm>
@@ -6668,8 +6423,8 @@
         </p:nvSpPr>
         <p:spPr>
           <a:xfrm>
-            <a:off x="2194560" y="6446520"/>
-            <a:ext cx="5943600" cy="274320"/>
+            <a:off x="11094415" y="6446520"/>
+            <a:ext cx="548640" cy="274320"/>
           </a:xfrm>
           <a:prstGeom prst="rect">
             <a:avLst/>
@@ -6682,7 +6437,7 @@
           </a:bodyPr>
           <a:lstStyle/>
           <a:p>
-            <a:pPr algn="l"/>
+            <a:pPr algn="r"/>
             <a:r>
               <a:rPr sz="1000" b="1" i="0">
                 <a:solidFill>
@@ -6690,7 +6445,7 @@
                 </a:solidFill>
                 <a:latin typeface="Calibri"/>
               </a:rPr>
-              <a:t>Inicio 5:10 pm</a:t>
+              <a:t>16</a:t>
             </a:r>
           </a:p>
         </p:txBody>
@@ -6698,41 +6453,6 @@
       <p:sp>
         <p:nvSpPr>
           <p:cNvPr id="6" name="TextBox 5"/>
-          <p:cNvSpPr txBox="1"/>
-          <p:nvPr/>
-        </p:nvSpPr>
-        <p:spPr>
-          <a:xfrm>
-            <a:off x="11094415" y="6446520"/>
-            <a:ext cx="548640" cy="274320"/>
-          </a:xfrm>
-          <a:prstGeom prst="rect">
-            <a:avLst/>
-          </a:prstGeom>
-          <a:noFill/>
-        </p:spPr>
-        <p:txBody>
-          <a:bodyPr wrap="square" anchor="t" lIns="0" rIns="0" tIns="0" bIns="0">
-            <a:spAutoFit/>
-          </a:bodyPr>
-          <a:lstStyle/>
-          <a:p>
-            <a:pPr algn="r"/>
-            <a:r>
-              <a:rPr sz="1000" b="1" i="0">
-                <a:solidFill>
-                  <a:srgbClr val="8F989D"/>
-                </a:solidFill>
-                <a:latin typeface="Calibri"/>
-              </a:rPr>
-              <a:t>16</a:t>
-            </a:r>
-          </a:p>
-        </p:txBody>
-      </p:sp>
-      <p:sp>
-        <p:nvSpPr>
-          <p:cNvPr id="7" name="TextBox 6"/>
           <p:cNvSpPr txBox="1"/>
           <p:nvPr/>
         </p:nvSpPr>
@@ -7204,41 +6924,6 @@
         </p:nvSpPr>
         <p:spPr>
           <a:xfrm>
-            <a:off x="2194560" y="6446520"/>
-            <a:ext cx="5943600" cy="274320"/>
-          </a:xfrm>
-          <a:prstGeom prst="rect">
-            <a:avLst/>
-          </a:prstGeom>
-          <a:noFill/>
-        </p:spPr>
-        <p:txBody>
-          <a:bodyPr wrap="square" anchor="t" lIns="0" rIns="0" tIns="0" bIns="0">
-            <a:spAutoFit/>
-          </a:bodyPr>
-          <a:lstStyle/>
-          <a:p>
-            <a:pPr algn="l"/>
-            <a:r>
-              <a:rPr sz="1000" b="1" i="0">
-                <a:solidFill>
-                  <a:srgbClr val="8F989D"/>
-                </a:solidFill>
-                <a:latin typeface="Calibri"/>
-              </a:rPr>
-              <a:t>Inicio 5:10 pm</a:t>
-            </a:r>
-          </a:p>
-        </p:txBody>
-      </p:sp>
-      <p:sp>
-        <p:nvSpPr>
-          <p:cNvPr id="11" name="TextBox 10"/>
-          <p:cNvSpPr txBox="1"/>
-          <p:nvPr/>
-        </p:nvSpPr>
-        <p:spPr>
-          <a:xfrm>
             <a:off x="11094415" y="6446520"/>
             <a:ext cx="548640" cy="274320"/>
           </a:xfrm>
@@ -7585,41 +7270,6 @@
         </p:nvSpPr>
         <p:spPr>
           <a:xfrm>
-            <a:off x="2194560" y="6446520"/>
-            <a:ext cx="5943600" cy="274320"/>
-          </a:xfrm>
-          <a:prstGeom prst="rect">
-            <a:avLst/>
-          </a:prstGeom>
-          <a:noFill/>
-        </p:spPr>
-        <p:txBody>
-          <a:bodyPr wrap="square" anchor="t" lIns="0" rIns="0" tIns="0" bIns="0">
-            <a:spAutoFit/>
-          </a:bodyPr>
-          <a:lstStyle/>
-          <a:p>
-            <a:pPr algn="l"/>
-            <a:r>
-              <a:rPr sz="1000" b="1" i="0">
-                <a:solidFill>
-                  <a:srgbClr val="8F989D"/>
-                </a:solidFill>
-                <a:latin typeface="Calibri"/>
-              </a:rPr>
-              <a:t>Inicio 5:10 pm</a:t>
-            </a:r>
-          </a:p>
-        </p:txBody>
-      </p:sp>
-      <p:sp>
-        <p:nvSpPr>
-          <p:cNvPr id="9" name="TextBox 8"/>
-          <p:cNvSpPr txBox="1"/>
-          <p:nvPr/>
-        </p:nvSpPr>
-        <p:spPr>
-          <a:xfrm>
             <a:off x="11094415" y="6446520"/>
             <a:ext cx="548640" cy="274320"/>
           </a:xfrm>
@@ -8064,41 +7714,6 @@
         </p:nvSpPr>
         <p:spPr>
           <a:xfrm>
-            <a:off x="2194560" y="6446520"/>
-            <a:ext cx="5943600" cy="274320"/>
-          </a:xfrm>
-          <a:prstGeom prst="rect">
-            <a:avLst/>
-          </a:prstGeom>
-          <a:noFill/>
-        </p:spPr>
-        <p:txBody>
-          <a:bodyPr wrap="square" anchor="t" lIns="0" rIns="0" tIns="0" bIns="0">
-            <a:spAutoFit/>
-          </a:bodyPr>
-          <a:lstStyle/>
-          <a:p>
-            <a:pPr algn="l"/>
-            <a:r>
-              <a:rPr sz="1000" b="1" i="0">
-                <a:solidFill>
-                  <a:srgbClr val="8F989D"/>
-                </a:solidFill>
-                <a:latin typeface="Calibri"/>
-              </a:rPr>
-              <a:t>Inicio 5:10 pm</a:t>
-            </a:r>
-          </a:p>
-        </p:txBody>
-      </p:sp>
-      <p:sp>
-        <p:nvSpPr>
-          <p:cNvPr id="6" name="TextBox 5"/>
-          <p:cNvSpPr txBox="1"/>
-          <p:nvPr/>
-        </p:nvSpPr>
-        <p:spPr>
-          <a:xfrm>
             <a:off x="11094415" y="6446520"/>
             <a:ext cx="548640" cy="274320"/>
           </a:xfrm>
@@ -8446,8 +8061,8 @@
         </p:nvSpPr>
         <p:spPr>
           <a:xfrm>
-            <a:off x="2194560" y="6446520"/>
-            <a:ext cx="5943600" cy="274320"/>
+            <a:off x="11094415" y="6446520"/>
+            <a:ext cx="548640" cy="274320"/>
           </a:xfrm>
           <a:prstGeom prst="rect">
             <a:avLst/>
@@ -8460,7 +8075,7 @@
           </a:bodyPr>
           <a:lstStyle/>
           <a:p>
-            <a:pPr algn="l"/>
+            <a:pPr algn="r"/>
             <a:r>
               <a:rPr sz="1000" b="1" i="0">
                 <a:solidFill>
@@ -8468,7 +8083,7 @@
                 </a:solidFill>
                 <a:latin typeface="Calibri"/>
               </a:rPr>
-              <a:t>Inicio 5:10 pm</a:t>
+              <a:t>2</a:t>
             </a:r>
           </a:p>
         </p:txBody>
@@ -8476,41 +8091,6 @@
       <p:sp>
         <p:nvSpPr>
           <p:cNvPr id="6" name="TextBox 5"/>
-          <p:cNvSpPr txBox="1"/>
-          <p:nvPr/>
-        </p:nvSpPr>
-        <p:spPr>
-          <a:xfrm>
-            <a:off x="11094415" y="6446520"/>
-            <a:ext cx="548640" cy="274320"/>
-          </a:xfrm>
-          <a:prstGeom prst="rect">
-            <a:avLst/>
-          </a:prstGeom>
-          <a:noFill/>
-        </p:spPr>
-        <p:txBody>
-          <a:bodyPr wrap="square" anchor="t" lIns="0" rIns="0" tIns="0" bIns="0">
-            <a:spAutoFit/>
-          </a:bodyPr>
-          <a:lstStyle/>
-          <a:p>
-            <a:pPr algn="r"/>
-            <a:r>
-              <a:rPr sz="1000" b="1" i="0">
-                <a:solidFill>
-                  <a:srgbClr val="8F989D"/>
-                </a:solidFill>
-                <a:latin typeface="Calibri"/>
-              </a:rPr>
-              <a:t>2</a:t>
-            </a:r>
-          </a:p>
-        </p:txBody>
-      </p:sp>
-      <p:sp>
-        <p:nvSpPr>
-          <p:cNvPr id="7" name="TextBox 6"/>
           <p:cNvSpPr txBox="1"/>
           <p:nvPr/>
         </p:nvSpPr>
@@ -8761,41 +8341,6 @@
           </a:p>
         </p:txBody>
       </p:sp>
-      <p:sp>
-        <p:nvSpPr>
-          <p:cNvPr id="7" name="TextBox 6"/>
-          <p:cNvSpPr txBox="1"/>
-          <p:nvPr/>
-        </p:nvSpPr>
-        <p:spPr>
-          <a:xfrm>
-            <a:off x="2194560" y="6446520"/>
-            <a:ext cx="5943600" cy="274320"/>
-          </a:xfrm>
-          <a:prstGeom prst="rect">
-            <a:avLst/>
-          </a:prstGeom>
-          <a:noFill/>
-        </p:spPr>
-        <p:txBody>
-          <a:bodyPr wrap="square" anchor="t" lIns="0" rIns="0" tIns="0" bIns="0">
-            <a:spAutoFit/>
-          </a:bodyPr>
-          <a:lstStyle/>
-          <a:p>
-            <a:pPr algn="l"/>
-            <a:r>
-              <a:rPr sz="1000" b="1" i="0">
-                <a:solidFill>
-                  <a:srgbClr val="8F989D"/>
-                </a:solidFill>
-                <a:latin typeface="Calibri"/>
-              </a:rPr>
-              <a:t>Inicio 5:10 pm</a:t>
-            </a:r>
-          </a:p>
-        </p:txBody>
-      </p:sp>
     </p:spTree>
   </p:cSld>
   <p:clrMapOvr>
@@ -9217,41 +8762,6 @@
       <p:sp>
         <p:nvSpPr>
           <p:cNvPr id="5" name="TextBox 4"/>
-          <p:cNvSpPr txBox="1"/>
-          <p:nvPr/>
-        </p:nvSpPr>
-        <p:spPr>
-          <a:xfrm>
-            <a:off x="2194560" y="6446520"/>
-            <a:ext cx="5943600" cy="274320"/>
-          </a:xfrm>
-          <a:prstGeom prst="rect">
-            <a:avLst/>
-          </a:prstGeom>
-          <a:noFill/>
-        </p:spPr>
-        <p:txBody>
-          <a:bodyPr wrap="square" anchor="t" lIns="0" rIns="0" tIns="0" bIns="0">
-            <a:spAutoFit/>
-          </a:bodyPr>
-          <a:lstStyle/>
-          <a:p>
-            <a:pPr algn="l"/>
-            <a:r>
-              <a:rPr sz="1000" b="1" i="0">
-                <a:solidFill>
-                  <a:srgbClr val="8F989D"/>
-                </a:solidFill>
-                <a:latin typeface="Calibri"/>
-              </a:rPr>
-              <a:t>Inicio 5:10 pm</a:t>
-            </a:r>
-          </a:p>
-        </p:txBody>
-      </p:sp>
-      <p:sp>
-        <p:nvSpPr>
-          <p:cNvPr id="6" name="TextBox 5"/>
           <p:cNvSpPr txBox="1"/>
           <p:nvPr/>
         </p:nvSpPr>
@@ -9920,41 +9430,6 @@
         </p:nvSpPr>
         <p:spPr>
           <a:xfrm>
-            <a:off x="2194560" y="6446520"/>
-            <a:ext cx="5943600" cy="274320"/>
-          </a:xfrm>
-          <a:prstGeom prst="rect">
-            <a:avLst/>
-          </a:prstGeom>
-          <a:noFill/>
-        </p:spPr>
-        <p:txBody>
-          <a:bodyPr wrap="square" anchor="t" lIns="0" rIns="0" tIns="0" bIns="0">
-            <a:spAutoFit/>
-          </a:bodyPr>
-          <a:lstStyle/>
-          <a:p>
-            <a:pPr algn="l"/>
-            <a:r>
-              <a:rPr sz="1000" b="1" i="0">
-                <a:solidFill>
-                  <a:srgbClr val="8F989D"/>
-                </a:solidFill>
-                <a:latin typeface="Calibri"/>
-              </a:rPr>
-              <a:t>Inicio 5:10 pm</a:t>
-            </a:r>
-          </a:p>
-        </p:txBody>
-      </p:sp>
-      <p:sp>
-        <p:nvSpPr>
-          <p:cNvPr id="7" name="TextBox 6"/>
-          <p:cNvSpPr txBox="1"/>
-          <p:nvPr/>
-        </p:nvSpPr>
-        <p:spPr>
-          <a:xfrm>
             <a:off x="11094415" y="6446520"/>
             <a:ext cx="548640" cy="274320"/>
           </a:xfrm>
@@ -10286,41 +9761,6 @@
         </p:nvSpPr>
         <p:spPr>
           <a:xfrm>
-            <a:off x="2194560" y="6446520"/>
-            <a:ext cx="5943600" cy="274320"/>
-          </a:xfrm>
-          <a:prstGeom prst="rect">
-            <a:avLst/>
-          </a:prstGeom>
-          <a:noFill/>
-        </p:spPr>
-        <p:txBody>
-          <a:bodyPr wrap="square" anchor="t" lIns="0" rIns="0" tIns="0" bIns="0">
-            <a:spAutoFit/>
-          </a:bodyPr>
-          <a:lstStyle/>
-          <a:p>
-            <a:pPr algn="l"/>
-            <a:r>
-              <a:rPr sz="1000" b="1" i="0">
-                <a:solidFill>
-                  <a:srgbClr val="8F989D"/>
-                </a:solidFill>
-                <a:latin typeface="Calibri"/>
-              </a:rPr>
-              <a:t>Inicio 5:10 pm</a:t>
-            </a:r>
-          </a:p>
-        </p:txBody>
-      </p:sp>
-      <p:sp>
-        <p:nvSpPr>
-          <p:cNvPr id="6" name="TextBox 5"/>
-          <p:cNvSpPr txBox="1"/>
-          <p:nvPr/>
-        </p:nvSpPr>
-        <p:spPr>
-          <a:xfrm>
             <a:off x="11094415" y="6446520"/>
             <a:ext cx="548640" cy="274320"/>
           </a:xfrm>
@@ -10543,41 +9983,6 @@
       <p:sp>
         <p:nvSpPr>
           <p:cNvPr id="5" name="TextBox 4"/>
-          <p:cNvSpPr txBox="1"/>
-          <p:nvPr/>
-        </p:nvSpPr>
-        <p:spPr>
-          <a:xfrm>
-            <a:off x="2194560" y="6446520"/>
-            <a:ext cx="5943600" cy="274320"/>
-          </a:xfrm>
-          <a:prstGeom prst="rect">
-            <a:avLst/>
-          </a:prstGeom>
-          <a:noFill/>
-        </p:spPr>
-        <p:txBody>
-          <a:bodyPr wrap="square" anchor="t" lIns="0" rIns="0" tIns="0" bIns="0">
-            <a:spAutoFit/>
-          </a:bodyPr>
-          <a:lstStyle/>
-          <a:p>
-            <a:pPr algn="l"/>
-            <a:r>
-              <a:rPr sz="1000" b="1" i="0">
-                <a:solidFill>
-                  <a:srgbClr val="8F989D"/>
-                </a:solidFill>
-                <a:latin typeface="Calibri"/>
-              </a:rPr>
-              <a:t>Inicio 5:10 pm</a:t>
-            </a:r>
-          </a:p>
-        </p:txBody>
-      </p:sp>
-      <p:sp>
-        <p:nvSpPr>
-          <p:cNvPr id="6" name="TextBox 5"/>
           <p:cNvSpPr txBox="1"/>
           <p:nvPr/>
         </p:nvSpPr>
@@ -11255,41 +10660,6 @@
         </p:nvSpPr>
         <p:spPr>
           <a:xfrm>
-            <a:off x="2194560" y="6446520"/>
-            <a:ext cx="5943600" cy="274320"/>
-          </a:xfrm>
-          <a:prstGeom prst="rect">
-            <a:avLst/>
-          </a:prstGeom>
-          <a:noFill/>
-        </p:spPr>
-        <p:txBody>
-          <a:bodyPr wrap="square" anchor="t" lIns="0" rIns="0" tIns="0" bIns="0">
-            <a:spAutoFit/>
-          </a:bodyPr>
-          <a:lstStyle/>
-          <a:p>
-            <a:pPr algn="l"/>
-            <a:r>
-              <a:rPr sz="1000" b="1" i="0">
-                <a:solidFill>
-                  <a:srgbClr val="8F989D"/>
-                </a:solidFill>
-                <a:latin typeface="Calibri"/>
-              </a:rPr>
-              <a:t>Inicio 5:10 pm</a:t>
-            </a:r>
-          </a:p>
-        </p:txBody>
-      </p:sp>
-      <p:sp>
-        <p:nvSpPr>
-          <p:cNvPr id="7" name="TextBox 6"/>
-          <p:cNvSpPr txBox="1"/>
-          <p:nvPr/>
-        </p:nvSpPr>
-        <p:spPr>
-          <a:xfrm>
             <a:off x="11094415" y="6446520"/>
             <a:ext cx="548640" cy="274320"/>
           </a:xfrm>
@@ -11652,41 +11022,6 @@
       <p:sp>
         <p:nvSpPr>
           <p:cNvPr id="5" name="TextBox 4"/>
-          <p:cNvSpPr txBox="1"/>
-          <p:nvPr/>
-        </p:nvSpPr>
-        <p:spPr>
-          <a:xfrm>
-            <a:off x="2194560" y="6446520"/>
-            <a:ext cx="5943600" cy="274320"/>
-          </a:xfrm>
-          <a:prstGeom prst="rect">
-            <a:avLst/>
-          </a:prstGeom>
-          <a:noFill/>
-        </p:spPr>
-        <p:txBody>
-          <a:bodyPr wrap="square" anchor="t" lIns="0" rIns="0" tIns="0" bIns="0">
-            <a:spAutoFit/>
-          </a:bodyPr>
-          <a:lstStyle/>
-          <a:p>
-            <a:pPr algn="l"/>
-            <a:r>
-              <a:rPr sz="1000" b="1" i="0">
-                <a:solidFill>
-                  <a:srgbClr val="8F989D"/>
-                </a:solidFill>
-                <a:latin typeface="Calibri"/>
-              </a:rPr>
-              <a:t>Inicio 5:10 pm</a:t>
-            </a:r>
-          </a:p>
-        </p:txBody>
-      </p:sp>
-      <p:sp>
-        <p:nvSpPr>
-          <p:cNvPr id="6" name="TextBox 5"/>
           <p:cNvSpPr txBox="1"/>
           <p:nvPr/>
         </p:nvSpPr>
@@ -12266,41 +11601,6 @@
         </p:nvSpPr>
         <p:spPr>
           <a:xfrm>
-            <a:off x="2194560" y="6446520"/>
-            <a:ext cx="5943600" cy="274320"/>
-          </a:xfrm>
-          <a:prstGeom prst="rect">
-            <a:avLst/>
-          </a:prstGeom>
-          <a:noFill/>
-        </p:spPr>
-        <p:txBody>
-          <a:bodyPr wrap="square" anchor="t" lIns="0" rIns="0" tIns="0" bIns="0">
-            <a:spAutoFit/>
-          </a:bodyPr>
-          <a:lstStyle/>
-          <a:p>
-            <a:pPr algn="l"/>
-            <a:r>
-              <a:rPr sz="1000" b="1" i="0">
-                <a:solidFill>
-                  <a:srgbClr val="8F989D"/>
-                </a:solidFill>
-                <a:latin typeface="Calibri"/>
-              </a:rPr>
-              <a:t>Inicio 5:10 pm</a:t>
-            </a:r>
-          </a:p>
-        </p:txBody>
-      </p:sp>
-      <p:sp>
-        <p:nvSpPr>
-          <p:cNvPr id="7" name="TextBox 6"/>
-          <p:cNvSpPr txBox="1"/>
-          <p:nvPr/>
-        </p:nvSpPr>
-        <p:spPr>
-          <a:xfrm>
             <a:off x="11094415" y="6446520"/>
             <a:ext cx="548640" cy="274320"/>
           </a:xfrm>

--- a/Pregrado/Trabajo de grado 3/Clases/Sesion 06 - Comunidades de práctica y co-creación/Presentacion.pptx
+++ b/Pregrado/Trabajo de grado 3/Clases/Sesion 06 - Comunidades de práctica y co-creación/Presentacion.pptx
@@ -25,6 +25,8 @@
     <p:sldId id="273" r:id="rId24"/>
     <p:sldId id="274" r:id="rId25"/>
     <p:sldId id="275" r:id="rId26"/>
+    <p:sldId id="276" r:id="rId27"/>
+    <p:sldId id="277" r:id="rId28"/>
   </p:sldIdLst>
   <p:sldSz cx="12191695" cy="6858000" type="screen4x3"/>
   <p:notesSz cx="6858000" cy="9144000"/>
@@ -6045,7 +6047,7 @@
                 </a:solidFill>
                 <a:latin typeface="Calibri"/>
               </a:rPr>
-              <a:t>TALLER — Pitch de 3 minutos y bitácora de co-creación</a:t>
+              <a:t>TALLER · Pitch de 3 minutos y bitácora de co-creación</a:t>
             </a:r>
           </a:p>
         </p:txBody>
@@ -6058,8 +6060,8 @@
         </p:nvSpPr>
         <p:spPr>
           <a:xfrm>
-            <a:off x="640080" y="1691639"/>
-            <a:ext cx="10911535" cy="4617720"/>
+            <a:off x="640080" y="1280160"/>
+            <a:ext cx="10911535" cy="411480"/>
           </a:xfrm>
           <a:prstGeom prst="rect">
             <a:avLst/>
@@ -6072,6 +6074,41 @@
           </a:bodyPr>
           <a:lstStyle/>
           <a:p>
+            <a:pPr algn="ctr"/>
+            <a:r>
+              <a:rPr sz="1500" b="0" i="0">
+                <a:solidFill>
+                  <a:srgbClr val="2B2B2B"/>
+                </a:solidFill>
+                <a:latin typeface="Calibri"/>
+              </a:rPr>
+              <a:t>En parejas o tríos, por turnos · el Docente modera y corta a los 3 minutos exactos</a:t>
+            </a:r>
+          </a:p>
+        </p:txBody>
+      </p:sp>
+      <p:sp>
+        <p:nvSpPr>
+          <p:cNvPr id="5" name="TextBox 4"/>
+          <p:cNvSpPr txBox="1"/>
+          <p:nvPr/>
+        </p:nvSpPr>
+        <p:spPr>
+          <a:xfrm>
+            <a:off x="640080" y="2011679"/>
+            <a:ext cx="10911535" cy="4297680"/>
+          </a:xfrm>
+          <a:prstGeom prst="rect">
+            <a:avLst/>
+          </a:prstGeom>
+          <a:noFill/>
+        </p:spPr>
+        <p:txBody>
+          <a:bodyPr wrap="square" anchor="t" lIns="0" rIns="0" tIns="0" bIns="0">
+            <a:spAutoFit/>
+          </a:bodyPr>
+          <a:lstStyle/>
+          <a:p>
             <a:pPr>
               <a:spcAft>
                 <a:spcPts val="1000"/>
@@ -6093,7 +6130,7 @@
                 </a:solidFill>
                 <a:latin typeface="Calibri"/>
               </a:rPr>
-              <a:t>Tiempo: 20 minutos.</a:t>
+              <a:t>Al final tiene:</a:t>
             </a:r>
             <a:r>
               <a:rPr sz="1600" b="0" i="0">
@@ -6102,7 +6139,7 @@
                 </a:solidFill>
                 <a:latin typeface="Calibri"/>
               </a:rPr>
-              <a:t> En parejas o tríos, por turnos. Entregable individual: `S06_CoCreacion_Apellido`.</a:t>
+              <a:t> su bitácora con el pedido que hizo, tres aprendizajes accionables y qué decide con cada uno.</a:t>
             </a:r>
           </a:p>
           <a:p>
@@ -6127,44 +6164,19 @@
                 </a:solidFill>
                 <a:latin typeface="Calibri"/>
               </a:rPr>
-              <a:t>Consigna literal:</a:t>
-            </a:r>
-          </a:p>
-          <a:p>
-            <a:pPr lvl="1">
-              <a:spcAft>
-                <a:spcPts val="600"/>
-              </a:spcAft>
-            </a:pPr>
-            <a:r>
-              <a:rPr sz="1500" b="0" i="0">
-                <a:solidFill>
-                  <a:srgbClr val="2B2B2B"/>
-                </a:solidFill>
-                <a:latin typeface="Calibri"/>
-              </a:rPr>
-              <a:t>●   </a:t>
-            </a:r>
-            <a:r>
-              <a:rPr sz="1500" b="1" i="0">
-                <a:solidFill>
-                  <a:srgbClr val="2B2B2B"/>
-                </a:solidFill>
-                <a:latin typeface="Calibri"/>
-              </a:rPr>
-              <a:t>(1)</a:t>
-            </a:r>
-            <a:r>
-              <a:rPr sz="1500" b="0" i="0">
-                <a:solidFill>
-                  <a:srgbClr val="2B2B2B"/>
-                </a:solidFill>
-                <a:latin typeface="Calibri"/>
-              </a:rPr>
-              <a:t> Dé su </a:t>
-            </a:r>
-            <a:r>
-              <a:rPr sz="1500" b="1" i="0">
+              <a:t>Paso 1</a:t>
+            </a:r>
+            <a:r>
+              <a:rPr sz="1600" b="0" i="0">
+                <a:solidFill>
+                  <a:srgbClr val="2B2B2B"/>
+                </a:solidFill>
+                <a:latin typeface="Calibri"/>
+              </a:rPr>
+              <a:t> · Dé su </a:t>
+            </a:r>
+            <a:r>
+              <a:rPr sz="1600" b="1" i="0">
                 <a:solidFill>
                   <a:srgbClr val="2B2B2B"/>
                 </a:solidFill>
@@ -6173,7 +6185,7 @@
               <a:t>pitch de 3 minutos</a:t>
             </a:r>
             <a:r>
-              <a:rPr sz="1500" b="0" i="0">
+              <a:rPr sz="1600" b="0" i="0">
                 <a:solidFill>
                   <a:srgbClr val="2B2B2B"/>
                 </a:solidFill>
@@ -6182,7 +6194,7 @@
               <a:t> con la estructura problema → pregunta → avance → </a:t>
             </a:r>
             <a:r>
-              <a:rPr sz="1500" b="1" i="0">
+              <a:rPr sz="1600" b="1" i="0">
                 <a:solidFill>
                   <a:srgbClr val="2B2B2B"/>
                 </a:solidFill>
@@ -6191,129 +6203,7 @@
               <a:t>pedido concreto</a:t>
             </a:r>
             <a:r>
-              <a:rPr sz="1500" b="0" i="0">
-                <a:solidFill>
-                  <a:srgbClr val="2B2B2B"/>
-                </a:solidFill>
-                <a:latin typeface="Calibri"/>
-              </a:rPr>
-              <a:t>.</a:t>
-            </a:r>
-          </a:p>
-          <a:p>
-            <a:pPr lvl="1">
-              <a:spcAft>
-                <a:spcPts val="600"/>
-              </a:spcAft>
-            </a:pPr>
-            <a:r>
-              <a:rPr sz="1500" b="0" i="0">
-                <a:solidFill>
-                  <a:srgbClr val="2B2B2B"/>
-                </a:solidFill>
-                <a:latin typeface="Calibri"/>
-              </a:rPr>
-              <a:t>●   </a:t>
-            </a:r>
-            <a:r>
-              <a:rPr sz="1500" b="1" i="0">
-                <a:solidFill>
-                  <a:srgbClr val="2B2B2B"/>
-                </a:solidFill>
-                <a:latin typeface="Calibri"/>
-              </a:rPr>
-              <a:t>(2)</a:t>
-            </a:r>
-            <a:r>
-              <a:rPr sz="1500" b="0" i="0">
-                <a:solidFill>
-                  <a:srgbClr val="2B2B2B"/>
-                </a:solidFill>
-                <a:latin typeface="Calibri"/>
-              </a:rPr>
-              <a:t> Cuando le toque escuchar, dé feedback </a:t>
-            </a:r>
-            <a:r>
-              <a:rPr sz="1500" b="1" i="0">
-                <a:solidFill>
-                  <a:srgbClr val="2B2B2B"/>
-                </a:solidFill>
-                <a:latin typeface="Calibri"/>
-              </a:rPr>
-              <a:t>sobre lo que el compañero pidió</a:t>
-            </a:r>
-            <a:r>
-              <a:rPr sz="1500" b="0" i="0">
-                <a:solidFill>
-                  <a:srgbClr val="2B2B2B"/>
-                </a:solidFill>
-                <a:latin typeface="Calibri"/>
-              </a:rPr>
-              <a:t>, no sobre sus gustos.</a:t>
-            </a:r>
-          </a:p>
-          <a:p>
-            <a:pPr lvl="1">
-              <a:spcAft>
-                <a:spcPts val="600"/>
-              </a:spcAft>
-            </a:pPr>
-            <a:r>
-              <a:rPr sz="1500" b="0" i="0">
-                <a:solidFill>
-                  <a:srgbClr val="2B2B2B"/>
-                </a:solidFill>
-                <a:latin typeface="Calibri"/>
-              </a:rPr>
-              <a:t>●   </a:t>
-            </a:r>
-            <a:r>
-              <a:rPr sz="1500" b="1" i="0">
-                <a:solidFill>
-                  <a:srgbClr val="2B2B2B"/>
-                </a:solidFill>
-                <a:latin typeface="Calibri"/>
-              </a:rPr>
-              <a:t>(3)</a:t>
-            </a:r>
-            <a:r>
-              <a:rPr sz="1500" b="0" i="0">
-                <a:solidFill>
-                  <a:srgbClr val="2B2B2B"/>
-                </a:solidFill>
-                <a:latin typeface="Calibri"/>
-              </a:rPr>
-              <a:t> Registre en su documento: el pedido que hizo, </a:t>
-            </a:r>
-            <a:r>
-              <a:rPr sz="1500" b="1" i="0">
-                <a:solidFill>
-                  <a:srgbClr val="2B2B2B"/>
-                </a:solidFill>
-                <a:latin typeface="Calibri"/>
-              </a:rPr>
-              <a:t>tres aprendizajes accionables</a:t>
-            </a:r>
-            <a:r>
-              <a:rPr sz="1500" b="0" i="0">
-                <a:solidFill>
-                  <a:srgbClr val="2B2B2B"/>
-                </a:solidFill>
-                <a:latin typeface="Calibri"/>
-              </a:rPr>
-              <a:t> que recibió, y qué decide con cada uno (adoptar / adaptar / descartar) </a:t>
-            </a:r>
-            <a:r>
-              <a:rPr sz="1500" b="1" i="0">
-                <a:solidFill>
-                  <a:srgbClr val="2B2B2B"/>
-                </a:solidFill>
-                <a:latin typeface="Calibri"/>
-              </a:rPr>
-              <a:t>con su razón</a:t>
-            </a:r>
-            <a:r>
-              <a:rPr sz="1500" b="0" i="0">
+              <a:rPr sz="1600" b="0" i="0">
                 <a:solidFill>
                   <a:srgbClr val="2B2B2B"/>
                 </a:solidFill>
@@ -6344,80 +6234,163 @@
                 </a:solidFill>
                 <a:latin typeface="Calibri"/>
               </a:rPr>
-              <a:t>Criterio de éxito (así se verifica):</a:t>
-            </a:r>
-          </a:p>
-          <a:p>
-            <a:pPr lvl="1">
+              <a:t>Paso 2</a:t>
+            </a:r>
+            <a:r>
+              <a:rPr sz="1600" b="0" i="0">
+                <a:solidFill>
+                  <a:srgbClr val="2B2B2B"/>
+                </a:solidFill>
+                <a:latin typeface="Calibri"/>
+              </a:rPr>
+              <a:t> · Cuando le toque escuchar, dé feedback </a:t>
+            </a:r>
+            <a:r>
+              <a:rPr sz="1600" b="1" i="0">
+                <a:solidFill>
+                  <a:srgbClr val="2B2B2B"/>
+                </a:solidFill>
+                <a:latin typeface="Calibri"/>
+              </a:rPr>
+              <a:t>sobre lo que el compañero pidió</a:t>
+            </a:r>
+            <a:r>
+              <a:rPr sz="1600" b="0" i="0">
+                <a:solidFill>
+                  <a:srgbClr val="2B2B2B"/>
+                </a:solidFill>
+                <a:latin typeface="Calibri"/>
+              </a:rPr>
+              <a:t>, no sobre sus gustos.</a:t>
+            </a:r>
+          </a:p>
+          <a:p>
+            <a:pPr>
               <a:spcAft>
-                <a:spcPts val="600"/>
+                <a:spcPts val="1000"/>
               </a:spcAft>
             </a:pPr>
             <a:r>
-              <a:rPr sz="1500" b="0" i="0">
-                <a:solidFill>
-                  <a:srgbClr val="2B2B2B"/>
-                </a:solidFill>
-                <a:latin typeface="Calibri"/>
-              </a:rPr>
-              <a:t>●   La bitácora deja claro </a:t>
-            </a:r>
-            <a:r>
-              <a:rPr sz="1500" b="1" i="0">
-                <a:solidFill>
-                  <a:srgbClr val="2B2B2B"/>
-                </a:solidFill>
-                <a:latin typeface="Calibri"/>
-              </a:rPr>
-              <a:t>qué es aporte externo y qué es decisión propia</a:t>
-            </a:r>
-            <a:r>
-              <a:rPr sz="1500" b="0" i="0">
-                <a:solidFill>
-                  <a:srgbClr val="2B2B2B"/>
-                </a:solidFill>
-                <a:latin typeface="Calibri"/>
-              </a:rPr>
-              <a:t>, con una razón en cada caso.</a:t>
-            </a:r>
-          </a:p>
-          <a:p>
-            <a:pPr lvl="1">
+              <a:rPr sz="1600" b="0" i="0">
+                <a:solidFill>
+                  <a:srgbClr val="2B2B2B"/>
+                </a:solidFill>
+                <a:latin typeface="Calibri"/>
+              </a:rPr>
+              <a:t>–   </a:t>
+            </a:r>
+            <a:r>
+              <a:rPr sz="1600" b="1" i="0">
+                <a:solidFill>
+                  <a:srgbClr val="2B2B2B"/>
+                </a:solidFill>
+                <a:latin typeface="Calibri"/>
+              </a:rPr>
+              <a:t>Paso 3</a:t>
+            </a:r>
+            <a:r>
+              <a:rPr sz="1600" b="0" i="0">
+                <a:solidFill>
+                  <a:srgbClr val="2B2B2B"/>
+                </a:solidFill>
+                <a:latin typeface="Calibri"/>
+              </a:rPr>
+              <a:t> · Registre en su documento: el pedido que hizo, </a:t>
+            </a:r>
+            <a:r>
+              <a:rPr sz="1600" b="1" i="0">
+                <a:solidFill>
+                  <a:srgbClr val="2B2B2B"/>
+                </a:solidFill>
+                <a:latin typeface="Calibri"/>
+              </a:rPr>
+              <a:t>tres aprendizajes accionables</a:t>
+            </a:r>
+            <a:r>
+              <a:rPr sz="1600" b="0" i="0">
+                <a:solidFill>
+                  <a:srgbClr val="2B2B2B"/>
+                </a:solidFill>
+                <a:latin typeface="Calibri"/>
+              </a:rPr>
+              <a:t> que recibió, y qué decide con cada uno —adoptar / adaptar / descartar— </a:t>
+            </a:r>
+            <a:r>
+              <a:rPr sz="1600" b="1" i="0">
+                <a:solidFill>
+                  <a:srgbClr val="2B2B2B"/>
+                </a:solidFill>
+                <a:latin typeface="Calibri"/>
+              </a:rPr>
+              <a:t>con su razón</a:t>
+            </a:r>
+            <a:r>
+              <a:rPr sz="1600" b="0" i="0">
+                <a:solidFill>
+                  <a:srgbClr val="2B2B2B"/>
+                </a:solidFill>
+                <a:latin typeface="Calibri"/>
+              </a:rPr>
+              <a:t>.</a:t>
+            </a:r>
+          </a:p>
+          <a:p>
+            <a:pPr>
               <a:spcAft>
-                <a:spcPts val="600"/>
+                <a:spcPts val="1000"/>
               </a:spcAft>
             </a:pPr>
             <a:r>
-              <a:rPr sz="1500" b="0" i="0">
-                <a:solidFill>
-                  <a:srgbClr val="2B2B2B"/>
-                </a:solidFill>
-                <a:latin typeface="Calibri"/>
-              </a:rPr>
-              <a:t>●   Ninguno de los tres aprendizajes está redactado como "me dijeron que estaba bien".</a:t>
-            </a:r>
-          </a:p>
-          <a:p>
-            <a:pPr lvl="1">
-              <a:spcAft>
-                <a:spcPts val="600"/>
-              </a:spcAft>
-            </a:pPr>
-            <a:r>
-              <a:rPr sz="1500" b="0" i="0">
-                <a:solidFill>
-                  <a:srgbClr val="2B2B2B"/>
-                </a:solidFill>
-                <a:latin typeface="Calibri"/>
-              </a:rPr>
-              <a:t>●   Su pitch cupo en los 3 minutos y terminó en un pedido específico, no en "bueno, eso es todo".</a:t>
-            </a:r>
-          </a:p>
-        </p:txBody>
-      </p:sp>
-      <p:sp>
-        <p:nvSpPr>
-          <p:cNvPr id="5" name="TextBox 4"/>
+              <a:rPr sz="1600" b="0" i="0">
+                <a:solidFill>
+                  <a:srgbClr val="2B2B2B"/>
+                </a:solidFill>
+                <a:latin typeface="Calibri"/>
+              </a:rPr>
+              <a:t>–   </a:t>
+            </a:r>
+            <a:r>
+              <a:rPr sz="1600" b="1" i="0">
+                <a:solidFill>
+                  <a:srgbClr val="2B2B2B"/>
+                </a:solidFill>
+                <a:latin typeface="Calibri"/>
+              </a:rPr>
+              <a:t>En clase, sin falta:</a:t>
+            </a:r>
+            <a:r>
+              <a:rPr sz="1600" b="0" i="0">
+                <a:solidFill>
+                  <a:srgbClr val="2B2B2B"/>
+                </a:solidFill>
+                <a:latin typeface="Calibri"/>
+              </a:rPr>
+              <a:t> los </a:t>
+            </a:r>
+            <a:r>
+              <a:rPr sz="1600" b="1" i="0">
+                <a:solidFill>
+                  <a:srgbClr val="2B2B2B"/>
+                </a:solidFill>
+                <a:latin typeface="Calibri"/>
+              </a:rPr>
+              <a:t>3 pasos</a:t>
+            </a:r>
+            <a:r>
+              <a:rPr sz="1600" b="0" i="0">
+                <a:solidFill>
+                  <a:srgbClr val="2B2B2B"/>
+                </a:solidFill>
+                <a:latin typeface="Calibri"/>
+              </a:rPr>
+              <a:t>. Lo que no alcance, ciérrelo hoy mismo en autónomo.</a:t>
+            </a:r>
+          </a:p>
+        </p:txBody>
+      </p:sp>
+      <p:sp>
+        <p:nvSpPr>
+          <p:cNvPr id="6" name="TextBox 5"/>
           <p:cNvSpPr txBox="1"/>
           <p:nvPr/>
         </p:nvSpPr>
@@ -6452,7 +6425,7 @@
       </p:sp>
       <p:sp>
         <p:nvSpPr>
-          <p:cNvPr id="6" name="TextBox 5"/>
+          <p:cNvPr id="7" name="TextBox 6"/>
           <p:cNvSpPr txBox="1"/>
           <p:nvPr/>
         </p:nvSpPr>
@@ -6479,25 +6452,7 @@
                 </a:solidFill>
                 <a:latin typeface="Calibri"/>
               </a:rPr>
-              <a:t>Mientras trabajan, </a:t>
-            </a:r>
-            <a:r>
-              <a:rPr sz="1200" b="1" i="1">
-                <a:solidFill>
-                  <a:srgbClr val="2B2B2B"/>
-                </a:solidFill>
-                <a:latin typeface="Calibri"/>
-              </a:rPr>
-              <a:t>el Docente</a:t>
-            </a:r>
-            <a:r>
-              <a:rPr sz="1200" b="0" i="1">
-                <a:solidFill>
-                  <a:srgbClr val="2B2B2B"/>
-                </a:solidFill>
-                <a:latin typeface="Calibri"/>
-              </a:rPr>
-              <a:t> modera los turnos y corta a los 3 minutos exactos. Pasarse de tiempo hoy es gratis; en la sustentación, no.</a:t>
+              <a:t>Pasarse de tiempo hoy es gratis; en la sustentación, no.</a:t>
             </a:r>
           </a:p>
         </p:txBody>
@@ -6602,6 +6557,532 @@
                 </a:solidFill>
                 <a:latin typeface="Calibri"/>
               </a:rPr>
+              <a:t>TALLER · cómo se revisa y dónde se entrega</a:t>
+            </a:r>
+          </a:p>
+        </p:txBody>
+      </p:sp>
+      <p:sp>
+        <p:nvSpPr>
+          <p:cNvPr id="4" name="TextBox 3"/>
+          <p:cNvSpPr txBox="1"/>
+          <p:nvPr/>
+        </p:nvSpPr>
+        <p:spPr>
+          <a:xfrm>
+            <a:off x="640080" y="1280160"/>
+            <a:ext cx="10911535" cy="411480"/>
+          </a:xfrm>
+          <a:prstGeom prst="rect">
+            <a:avLst/>
+          </a:prstGeom>
+          <a:noFill/>
+        </p:spPr>
+        <p:txBody>
+          <a:bodyPr wrap="square" anchor="t" lIns="0" rIns="0" tIns="0" bIns="0">
+            <a:spAutoFit/>
+          </a:bodyPr>
+          <a:lstStyle/>
+          <a:p>
+            <a:pPr algn="ctr"/>
+            <a:r>
+              <a:rPr sz="1500" b="0" i="0">
+                <a:solidFill>
+                  <a:srgbClr val="2B2B2B"/>
+                </a:solidFill>
+                <a:latin typeface="Calibri"/>
+              </a:rPr>
+              <a:t>Pitch de 3 minutos y bitácora de co-creación</a:t>
+            </a:r>
+          </a:p>
+        </p:txBody>
+      </p:sp>
+      <p:sp>
+        <p:nvSpPr>
+          <p:cNvPr id="5" name="TextBox 4"/>
+          <p:cNvSpPr txBox="1"/>
+          <p:nvPr/>
+        </p:nvSpPr>
+        <p:spPr>
+          <a:xfrm>
+            <a:off x="640080" y="2011679"/>
+            <a:ext cx="10911535" cy="4297680"/>
+          </a:xfrm>
+          <a:prstGeom prst="rect">
+            <a:avLst/>
+          </a:prstGeom>
+          <a:noFill/>
+        </p:spPr>
+        <p:txBody>
+          <a:bodyPr wrap="square" anchor="t" lIns="0" rIns="0" tIns="0" bIns="0">
+            <a:spAutoFit/>
+          </a:bodyPr>
+          <a:lstStyle/>
+          <a:p>
+            <a:pPr>
+              <a:spcAft>
+                <a:spcPts val="1000"/>
+              </a:spcAft>
+            </a:pPr>
+            <a:r>
+              <a:rPr sz="1600" b="0" i="0">
+                <a:solidFill>
+                  <a:srgbClr val="2B2B2B"/>
+                </a:solidFill>
+                <a:latin typeface="Calibri"/>
+              </a:rPr>
+              <a:t>–   </a:t>
+            </a:r>
+            <a:r>
+              <a:rPr sz="1600" b="1" i="0">
+                <a:solidFill>
+                  <a:srgbClr val="2B2B2B"/>
+                </a:solidFill>
+                <a:latin typeface="Calibri"/>
+              </a:rPr>
+              <a:t>Quedó bien si</a:t>
+            </a:r>
+            <a:r>
+              <a:rPr sz="1600" b="0" i="0">
+                <a:solidFill>
+                  <a:srgbClr val="2B2B2B"/>
+                </a:solidFill>
+                <a:latin typeface="Calibri"/>
+              </a:rPr>
+              <a:t> —compruébelo usted antes de cerrar el documento—:</a:t>
+            </a:r>
+          </a:p>
+          <a:p>
+            <a:pPr lvl="1">
+              <a:spcAft>
+                <a:spcPts val="600"/>
+              </a:spcAft>
+            </a:pPr>
+            <a:r>
+              <a:rPr sz="1500" b="0" i="0">
+                <a:solidFill>
+                  <a:srgbClr val="2B2B2B"/>
+                </a:solidFill>
+                <a:latin typeface="Calibri"/>
+              </a:rPr>
+              <a:t>●   La bitácora deja claro </a:t>
+            </a:r>
+            <a:r>
+              <a:rPr sz="1500" b="1" i="0">
+                <a:solidFill>
+                  <a:srgbClr val="2B2B2B"/>
+                </a:solidFill>
+                <a:latin typeface="Calibri"/>
+              </a:rPr>
+              <a:t>qué es aporte externo y qué es decisión propia</a:t>
+            </a:r>
+            <a:r>
+              <a:rPr sz="1500" b="0" i="0">
+                <a:solidFill>
+                  <a:srgbClr val="2B2B2B"/>
+                </a:solidFill>
+                <a:latin typeface="Calibri"/>
+              </a:rPr>
+              <a:t>, con una razón en cada caso.</a:t>
+            </a:r>
+          </a:p>
+          <a:p>
+            <a:pPr lvl="1">
+              <a:spcAft>
+                <a:spcPts val="600"/>
+              </a:spcAft>
+            </a:pPr>
+            <a:r>
+              <a:rPr sz="1500" b="0" i="0">
+                <a:solidFill>
+                  <a:srgbClr val="2B2B2B"/>
+                </a:solidFill>
+                <a:latin typeface="Calibri"/>
+              </a:rPr>
+              <a:t>●   </a:t>
+            </a:r>
+            <a:r>
+              <a:rPr sz="1500" b="1" i="0">
+                <a:solidFill>
+                  <a:srgbClr val="2B2B2B"/>
+                </a:solidFill>
+                <a:latin typeface="Calibri"/>
+              </a:rPr>
+              <a:t>Ninguno</a:t>
+            </a:r>
+            <a:r>
+              <a:rPr sz="1500" b="0" i="0">
+                <a:solidFill>
+                  <a:srgbClr val="2B2B2B"/>
+                </a:solidFill>
+                <a:latin typeface="Calibri"/>
+              </a:rPr>
+              <a:t> de los tres aprendizajes dice «me dijeron que estaba bien».</a:t>
+            </a:r>
+          </a:p>
+          <a:p>
+            <a:pPr lvl="1">
+              <a:spcAft>
+                <a:spcPts val="600"/>
+              </a:spcAft>
+            </a:pPr>
+            <a:r>
+              <a:rPr sz="1500" b="0" i="0">
+                <a:solidFill>
+                  <a:srgbClr val="2B2B2B"/>
+                </a:solidFill>
+                <a:latin typeface="Calibri"/>
+              </a:rPr>
+              <a:t>●   Su pitch </a:t>
+            </a:r>
+            <a:r>
+              <a:rPr sz="1500" b="1" i="0">
+                <a:solidFill>
+                  <a:srgbClr val="2B2B2B"/>
+                </a:solidFill>
+                <a:latin typeface="Calibri"/>
+              </a:rPr>
+              <a:t>cupo en los 3 minutos</a:t>
+            </a:r>
+            <a:r>
+              <a:rPr sz="1500" b="0" i="0">
+                <a:solidFill>
+                  <a:srgbClr val="2B2B2B"/>
+                </a:solidFill>
+                <a:latin typeface="Calibri"/>
+              </a:rPr>
+              <a:t> y terminó en un pedido específico, no en «bueno, eso es todo».</a:t>
+            </a:r>
+          </a:p>
+          <a:p>
+            <a:pPr>
+              <a:spcAft>
+                <a:spcPts val="1000"/>
+              </a:spcAft>
+            </a:pPr>
+            <a:r>
+              <a:rPr sz="1600" b="0" i="0">
+                <a:solidFill>
+                  <a:srgbClr val="2B2B2B"/>
+                </a:solidFill>
+                <a:latin typeface="Calibri"/>
+              </a:rPr>
+              <a:t>–   </a:t>
+            </a:r>
+            <a:r>
+              <a:rPr sz="1600" b="1" i="0">
+                <a:solidFill>
+                  <a:srgbClr val="2B2B2B"/>
+                </a:solidFill>
+                <a:latin typeface="Calibri"/>
+              </a:rPr>
+              <a:t>Plan B:</a:t>
+            </a:r>
+            <a:r>
+              <a:rPr sz="1600" b="0" i="0">
+                <a:solidFill>
+                  <a:srgbClr val="2B2B2B"/>
+                </a:solidFill>
+                <a:latin typeface="Calibri"/>
+              </a:rPr>
+              <a:t> Si no sabe qué pedir, pida lo que más le duele: la pregunta, la muestra o el instrumento. Un pedido concreto es lo que hace útil el turno del otro.</a:t>
+            </a:r>
+          </a:p>
+          <a:p>
+            <a:pPr>
+              <a:spcAft>
+                <a:spcPts val="1000"/>
+              </a:spcAft>
+            </a:pPr>
+            <a:r>
+              <a:rPr sz="1600" b="0" i="0">
+                <a:solidFill>
+                  <a:srgbClr val="2B2B2B"/>
+                </a:solidFill>
+                <a:latin typeface="Calibri"/>
+              </a:rPr>
+              <a:t>–   </a:t>
+            </a:r>
+            <a:r>
+              <a:rPr sz="1600" b="1" i="0">
+                <a:solidFill>
+                  <a:srgbClr val="2B2B2B"/>
+                </a:solidFill>
+                <a:latin typeface="Calibri"/>
+              </a:rPr>
+              <a:t>Hoy no se sube nada al aula:</a:t>
+            </a:r>
+            <a:r>
+              <a:rPr sz="1600" b="0" i="0">
+                <a:solidFill>
+                  <a:srgbClr val="2B2B2B"/>
+                </a:solidFill>
+                <a:latin typeface="Calibri"/>
+              </a:rPr>
+              <a:t> guarde `S06_CoCreacion_Apellido` (Google Doc o PDF) en su Drive y tráigalo a la próxima sesión. Es un </a:t>
+            </a:r>
+            <a:r>
+              <a:rPr sz="1600" b="1" i="0">
+                <a:solidFill>
+                  <a:srgbClr val="2B2B2B"/>
+                </a:solidFill>
+                <a:latin typeface="Calibri"/>
+              </a:rPr>
+              <a:t>avance formativo</a:t>
+            </a:r>
+            <a:r>
+              <a:rPr sz="1600" b="0" i="0">
+                <a:solidFill>
+                  <a:srgbClr val="2B2B2B"/>
+                </a:solidFill>
+                <a:latin typeface="Calibri"/>
+              </a:rPr>
+              <a:t>, se revisa en clase.</a:t>
+            </a:r>
+          </a:p>
+          <a:p>
+            <a:pPr>
+              <a:spcAft>
+                <a:spcPts val="1000"/>
+              </a:spcAft>
+            </a:pPr>
+            <a:r>
+              <a:rPr sz="1600" b="0" i="0">
+                <a:solidFill>
+                  <a:srgbClr val="2B2B2B"/>
+                </a:solidFill>
+                <a:latin typeface="Calibri"/>
+              </a:rPr>
+              <a:t>–   </a:t>
+            </a:r>
+            <a:r>
+              <a:rPr sz="1600" b="1" i="0">
+                <a:solidFill>
+                  <a:srgbClr val="2B2B2B"/>
+                </a:solidFill>
+                <a:latin typeface="Calibri"/>
+              </a:rPr>
+              <a:t>Esto alimenta:</a:t>
+            </a:r>
+            <a:r>
+              <a:rPr sz="1600" b="0" i="0">
+                <a:solidFill>
+                  <a:srgbClr val="2B2B2B"/>
+                </a:solidFill>
+                <a:latin typeface="Calibri"/>
+              </a:rPr>
+              <a:t> </a:t>
+            </a:r>
+            <a:r>
+              <a:rPr sz="1600" b="1" i="0">
+                <a:solidFill>
+                  <a:srgbClr val="2B2B2B"/>
+                </a:solidFill>
+                <a:latin typeface="Calibri"/>
+              </a:rPr>
+              <a:t>ACA Final</a:t>
+            </a:r>
+            <a:r>
+              <a:rPr sz="1600" b="0" i="0">
+                <a:solidFill>
+                  <a:srgbClr val="2B2B2B"/>
+                </a:solidFill>
+                <a:latin typeface="Calibri"/>
+              </a:rPr>
+              <a:t> —tarea, 32%—, el documento que </a:t>
+            </a:r>
+            <a:r>
+              <a:rPr sz="1600" b="1" i="0">
+                <a:solidFill>
+                  <a:srgbClr val="2B2B2B"/>
+                </a:solidFill>
+                <a:latin typeface="Calibri"/>
+              </a:rPr>
+              <a:t>sí</a:t>
+            </a:r>
+            <a:r>
+              <a:rPr sz="1600" b="0" i="0">
+                <a:solidFill>
+                  <a:srgbClr val="2B2B2B"/>
+                </a:solidFill>
+                <a:latin typeface="Calibri"/>
+              </a:rPr>
+              <a:t> recibe </a:t>
+            </a:r>
+            <a:r>
+              <a:rPr sz="1600" b="1" i="0">
+                <a:solidFill>
+                  <a:srgbClr val="2B2B2B"/>
+                </a:solidFill>
+                <a:latin typeface="Calibri"/>
+              </a:rPr>
+              <a:t>el aula de su grupo</a:t>
+            </a:r>
+            <a:r>
+              <a:rPr sz="1600" b="0" i="0">
+                <a:solidFill>
+                  <a:srgbClr val="2B2B2B"/>
+                </a:solidFill>
+                <a:latin typeface="Calibri"/>
+              </a:rPr>
+              <a:t> en CDigital; cierra en la semana de la </a:t>
+            </a:r>
+            <a:r>
+              <a:rPr sz="1600" b="1" i="0">
+                <a:solidFill>
+                  <a:srgbClr val="2B2B2B"/>
+                </a:solidFill>
+                <a:latin typeface="Calibri"/>
+              </a:rPr>
+              <a:t>Sesión 13</a:t>
+            </a:r>
+            <a:r>
+              <a:rPr sz="1600" b="0" i="0">
+                <a:solidFill>
+                  <a:srgbClr val="2B2B2B"/>
+                </a:solidFill>
+                <a:latin typeface="Calibri"/>
+              </a:rPr>
+              <a:t>.</a:t>
+            </a:r>
+          </a:p>
+        </p:txBody>
+      </p:sp>
+      <p:sp>
+        <p:nvSpPr>
+          <p:cNvPr id="6" name="TextBox 5"/>
+          <p:cNvSpPr txBox="1"/>
+          <p:nvPr/>
+        </p:nvSpPr>
+        <p:spPr>
+          <a:xfrm>
+            <a:off x="11094415" y="6446520"/>
+            <a:ext cx="548640" cy="274320"/>
+          </a:xfrm>
+          <a:prstGeom prst="rect">
+            <a:avLst/>
+          </a:prstGeom>
+          <a:noFill/>
+        </p:spPr>
+        <p:txBody>
+          <a:bodyPr wrap="square" anchor="t" lIns="0" rIns="0" tIns="0" bIns="0">
+            <a:spAutoFit/>
+          </a:bodyPr>
+          <a:lstStyle/>
+          <a:p>
+            <a:pPr algn="r"/>
+            <a:r>
+              <a:rPr sz="1000" b="1" i="0">
+                <a:solidFill>
+                  <a:srgbClr val="8F989D"/>
+                </a:solidFill>
+                <a:latin typeface="Calibri"/>
+              </a:rPr>
+              <a:t>17</a:t>
+            </a:r>
+          </a:p>
+        </p:txBody>
+      </p:sp>
+    </p:spTree>
+  </p:cSld>
+  <p:clrMapOvr>
+    <a:masterClrMapping/>
+  </p:clrMapOvr>
+</p:sld>
+</file>
+
+<file path=ppt/slides/slide18.xml><?xml version="1.0" encoding="utf-8"?>
+<p:sld xmlns:a="http://schemas.openxmlformats.org/drawingml/2006/main" xmlns:p="http://schemas.openxmlformats.org/presentationml/2006/main" xmlns:r="http://schemas.openxmlformats.org/officeDocument/2006/relationships">
+  <p:cSld>
+    <p:bg>
+      <p:bgPr>
+        <a:solidFill>
+          <a:srgbClr val="FFFFFF"/>
+        </a:solidFill>
+        <a:effectLst/>
+      </p:bgPr>
+    </p:bg>
+    <p:spTree>
+      <p:nvGrpSpPr>
+        <p:cNvPr id="1" name=""/>
+        <p:cNvGrpSpPr/>
+        <p:nvPr/>
+      </p:nvGrpSpPr>
+      <p:grpSpPr/>
+      <p:sp>
+        <p:nvSpPr>
+          <p:cNvPr id="2" name="Rectangle 1"/>
+          <p:cNvSpPr/>
+          <p:nvPr/>
+        </p:nvSpPr>
+        <p:spPr>
+          <a:xfrm>
+            <a:off x="0" y="0"/>
+            <a:ext cx="12191695" cy="1188720"/>
+          </a:xfrm>
+          <a:prstGeom prst="rect">
+            <a:avLst/>
+          </a:prstGeom>
+          <a:solidFill>
+            <a:srgbClr val="0C2340"/>
+          </a:solidFill>
+          <a:ln>
+            <a:noFill/>
+          </a:ln>
+          <a:effectLst/>
+        </p:spPr>
+        <p:style>
+          <a:lnRef idx="1">
+            <a:schemeClr val="accent1"/>
+          </a:lnRef>
+          <a:fillRef idx="3">
+            <a:schemeClr val="accent1"/>
+          </a:fillRef>
+          <a:effectRef idx="2">
+            <a:schemeClr val="accent1"/>
+          </a:effectRef>
+          <a:fontRef idx="minor">
+            <a:schemeClr val="lt1"/>
+          </a:fontRef>
+        </p:style>
+        <p:txBody>
+          <a:bodyPr rtlCol="0" anchor="ctr"/>
+          <a:lstStyle/>
+          <a:p>
+            <a:pPr algn="ctr"/>
+          </a:p>
+        </p:txBody>
+      </p:sp>
+      <p:sp>
+        <p:nvSpPr>
+          <p:cNvPr id="3" name="TextBox 2"/>
+          <p:cNvSpPr txBox="1"/>
+          <p:nvPr/>
+        </p:nvSpPr>
+        <p:spPr>
+          <a:xfrm>
+            <a:off x="640080" y="0"/>
+            <a:ext cx="9082735" cy="1188720"/>
+          </a:xfrm>
+          <a:prstGeom prst="rect">
+            <a:avLst/>
+          </a:prstGeom>
+          <a:noFill/>
+        </p:spPr>
+        <p:txBody>
+          <a:bodyPr wrap="square" anchor="ctr" lIns="0" rIns="0" tIns="0" bIns="0">
+            <a:spAutoFit/>
+          </a:bodyPr>
+          <a:lstStyle/>
+          <a:p>
+            <a:pPr algn="ctr"/>
+            <a:r>
+              <a:rPr sz="2600" b="1" i="0">
+                <a:solidFill>
+                  <a:srgbClr val="FFFFFF"/>
+                </a:solidFill>
+                <a:latin typeface="Calibri"/>
+              </a:rPr>
               <a:t>Checklist de autoevaluación antes de subir a CDigital</a:t>
             </a:r>
           </a:p>
@@ -6946,7 +7427,7 @@
                 </a:solidFill>
                 <a:latin typeface="Calibri"/>
               </a:rPr>
-              <a:t>17</a:t>
+              <a:t>18</a:t>
             </a:r>
           </a:p>
         </p:txBody>
@@ -6959,7 +7440,7 @@
 </p:sld>
 </file>
 
-<file path=ppt/slides/slide18.xml><?xml version="1.0" encoding="utf-8"?>
+<file path=ppt/slides/slide19.xml><?xml version="1.0" encoding="utf-8"?>
 <p:sld xmlns:a="http://schemas.openxmlformats.org/drawingml/2006/main" xmlns:p="http://schemas.openxmlformats.org/presentationml/2006/main" xmlns:r="http://schemas.openxmlformats.org/officeDocument/2006/relationships">
   <p:cSld>
     <p:bg>
@@ -7292,7 +7773,7 @@
                 </a:solidFill>
                 <a:latin typeface="Calibri"/>
               </a:rPr>
-              <a:t>18</a:t>
+              <a:t>19</a:t>
             </a:r>
           </a:p>
         </p:txBody>
@@ -7305,7 +7786,7 @@
 </p:sld>
 </file>
 
-<file path=ppt/slides/slide19.xml><?xml version="1.0" encoding="utf-8"?>
+<file path=ppt/slides/slide2.xml><?xml version="1.0" encoding="utf-8"?>
 <p:sld xmlns:a="http://schemas.openxmlformats.org/drawingml/2006/main" xmlns:p="http://schemas.openxmlformats.org/presentationml/2006/main" xmlns:r="http://schemas.openxmlformats.org/officeDocument/2006/relationships">
   <p:cSld>
     <p:bg>
@@ -7397,7 +7878,7 @@
                 </a:solidFill>
                 <a:latin typeface="Calibri"/>
               </a:rPr>
-              <a:t>Para continuar — trabajo autónomo</a:t>
+              <a:t>El aislamiento es el peor enemigo del trabajo de grado</a:t>
             </a:r>
           </a:p>
         </p:txBody>
@@ -7436,7 +7917,7 @@
                 </a:solidFill>
                 <a:latin typeface="Calibri"/>
               </a:rPr>
-              <a:t>–   </a:t>
+              <a:t>–   Hoy cambiamos de ritmo: su proyecto </a:t>
             </a:r>
             <a:r>
               <a:rPr sz="1600" b="1" i="0">
@@ -7445,7 +7926,7 @@
                 </a:solidFill>
                 <a:latin typeface="Calibri"/>
               </a:rPr>
-              <a:t>Suba</a:t>
+              <a:t>sale de la burbuja</a:t>
             </a:r>
             <a:r>
               <a:rPr sz="1600" b="0" i="0">
@@ -7454,25 +7935,7 @@
                 </a:solidFill>
                 <a:latin typeface="Calibri"/>
               </a:rPr>
-              <a:t> `S06_CoCreacion_Apellido` con su bitácora a </a:t>
-            </a:r>
-            <a:r>
-              <a:rPr sz="1600" b="1" i="0">
-                <a:solidFill>
-                  <a:srgbClr val="2B2B2B"/>
-                </a:solidFill>
-                <a:latin typeface="Calibri"/>
-              </a:rPr>
-              <a:t>CDigital</a:t>
-            </a:r>
-            <a:r>
-              <a:rPr sz="1600" b="0" i="0">
-                <a:solidFill>
-                  <a:srgbClr val="2B2B2B"/>
-                </a:solidFill>
-                <a:latin typeface="Calibri"/>
-              </a:rPr>
-              <a:t>: [URL CDigital — campus del curso pendiente]</a:t>
+              <a:t> y se expone a otros ojos.</a:t>
             </a:r>
           </a:p>
           <a:p>
@@ -7488,7 +7951,7 @@
                 </a:solidFill>
                 <a:latin typeface="Calibri"/>
               </a:rPr>
-              <a:t>–   </a:t>
+              <a:t>–   Los proyectos que se caen en la sustentación casi nunca se caen por falta de esfuerzo: se caen porque </a:t>
             </a:r>
             <a:r>
               <a:rPr sz="1600" b="1" i="0">
@@ -7497,7 +7960,16 @@
                 </a:solidFill>
                 <a:latin typeface="Calibri"/>
               </a:rPr>
-              <a:t>Trabajo autónomo (extensión de la sesión):</a:t>
+              <a:t>nadie los miró antes</a:t>
+            </a:r>
+            <a:r>
+              <a:rPr sz="1600" b="0" i="0">
+                <a:solidFill>
+                  <a:srgbClr val="2B2B2B"/>
+                </a:solidFill>
+                <a:latin typeface="Calibri"/>
+              </a:rPr>
+              <a:t>.</a:t>
             </a:r>
           </a:p>
           <a:p>
@@ -7513,25 +7985,23 @@
                 </a:solidFill>
                 <a:latin typeface="Calibri"/>
               </a:rPr>
-              <a:t>●   </a:t>
-            </a:r>
-            <a:r>
-              <a:rPr sz="1500" b="1" i="0">
-                <a:solidFill>
-                  <a:srgbClr val="2B2B2B"/>
-                </a:solidFill>
-                <a:latin typeface="Calibri"/>
-              </a:rPr>
-              <a:t>Aplique de verdad</a:t>
-            </a:r>
-            <a:r>
-              <a:rPr sz="1500" b="0" i="0">
-                <a:solidFill>
-                  <a:srgbClr val="2B2B2B"/>
-                </a:solidFill>
-                <a:latin typeface="Calibri"/>
-              </a:rPr>
-              <a:t> los aportes que marcó como "adopto" o "adapto". Una bitácora sin cambios en el documento es papel mojado.</a:t>
+              <a:t>●   El autor deja de ver los huecos de su propio texto después de la tercera lectura. Es un efecto conocido y le pasa a todo el mundo.</a:t>
+            </a:r>
+          </a:p>
+          <a:p>
+            <a:pPr>
+              <a:spcAft>
+                <a:spcPts val="1000"/>
+              </a:spcAft>
+            </a:pPr>
+            <a:r>
+              <a:rPr sz="1600" b="0" i="0">
+                <a:solidFill>
+                  <a:srgbClr val="2B2B2B"/>
+                </a:solidFill>
+                <a:latin typeface="Calibri"/>
+              </a:rPr>
+              <a:t>–   Un compañero que no conoce su tema detecta en tres minutos lo que usted no vio en tres semanas.</a:t>
             </a:r>
           </a:p>
           <a:p>
@@ -7547,93 +8017,7 @@
                 </a:solidFill>
                 <a:latin typeface="Calibri"/>
               </a:rPr>
-              <a:t>●   Busque </a:t>
-            </a:r>
-            <a:r>
-              <a:rPr sz="1500" b="1" i="0">
-                <a:solidFill>
-                  <a:srgbClr val="2B2B2B"/>
-                </a:solidFill>
-                <a:latin typeface="Calibri"/>
-              </a:rPr>
-              <a:t>una persona externa al curso</a:t>
-            </a:r>
-            <a:r>
-              <a:rPr sz="1500" b="0" i="0">
-                <a:solidFill>
-                  <a:srgbClr val="2B2B2B"/>
-                </a:solidFill>
-                <a:latin typeface="Calibri"/>
-              </a:rPr>
-              <a:t> —del área donde investiga, o de otro semestre— y repítale el pitch de 3 minutos. El feedback de afuera es distinto.</a:t>
-            </a:r>
-          </a:p>
-          <a:p>
-            <a:pPr lvl="1">
-              <a:spcAft>
-                <a:spcPts val="600"/>
-              </a:spcAft>
-            </a:pPr>
-            <a:r>
-              <a:rPr sz="1500" b="0" i="0">
-                <a:solidFill>
-                  <a:srgbClr val="2B2B2B"/>
-                </a:solidFill>
-                <a:latin typeface="Calibri"/>
-              </a:rPr>
-              <a:t>●   Deje la bitácora </a:t>
-            </a:r>
-            <a:r>
-              <a:rPr sz="1500" b="1" i="0">
-                <a:solidFill>
-                  <a:srgbClr val="2B2B2B"/>
-                </a:solidFill>
-                <a:latin typeface="Calibri"/>
-              </a:rPr>
-              <a:t>abierta y viva</a:t>
-            </a:r>
-            <a:r>
-              <a:rPr sz="1500" b="0" i="0">
-                <a:solidFill>
-                  <a:srgbClr val="2B2B2B"/>
-                </a:solidFill>
-                <a:latin typeface="Calibri"/>
-              </a:rPr>
-              <a:t>: cada vez que reciba un aporte de aquí en adelante, agregue una fila.</a:t>
-            </a:r>
-          </a:p>
-          <a:p>
-            <a:pPr lvl="1">
-              <a:spcAft>
-                <a:spcPts val="600"/>
-              </a:spcAft>
-            </a:pPr>
-            <a:r>
-              <a:rPr sz="1500" b="0" i="0">
-                <a:solidFill>
-                  <a:srgbClr val="2B2B2B"/>
-                </a:solidFill>
-                <a:latin typeface="Calibri"/>
-              </a:rPr>
-              <a:t>●   Si su marco lo permite, busque en Google Académico </a:t>
-            </a:r>
-            <a:r>
-              <a:rPr sz="1500" b="1" i="0">
-                <a:solidFill>
-                  <a:srgbClr val="2B2B2B"/>
-                </a:solidFill>
-                <a:latin typeface="Calibri"/>
-              </a:rPr>
-              <a:t>un referente sobre comunidades de práctica o co-creación</a:t>
-            </a:r>
-            <a:r>
-              <a:rPr sz="1500" b="0" i="0">
-                <a:solidFill>
-                  <a:srgbClr val="2B2B2B"/>
-                </a:solidFill>
-                <a:latin typeface="Calibri"/>
-              </a:rPr>
-              <a:t> y agréguelo a sus fichas.</a:t>
+              <a:t>●   "No entendí qué mide su instrumento" dicho hoy vale oro; dicho por un jurado, cuesta la nota.</a:t>
             </a:r>
           </a:p>
           <a:p>
@@ -7649,7 +8033,7 @@
                 </a:solidFill>
                 <a:latin typeface="Calibri"/>
               </a:rPr>
-              <a:t>–   </a:t>
+              <a:t>–   El grupo de este curso </a:t>
             </a:r>
             <a:r>
               <a:rPr sz="1600" b="1" i="0">
@@ -7658,7 +8042,7 @@
                 </a:solidFill>
                 <a:latin typeface="Calibri"/>
               </a:rPr>
-              <a:t>En la próxima sesión</a:t>
+              <a:t>es</a:t>
             </a:r>
             <a:r>
               <a:rPr sz="1600" b="0" i="0">
@@ -7667,41 +8051,41 @@
                 </a:solidFill>
                 <a:latin typeface="Calibri"/>
               </a:rPr>
-              <a:t> pasamos a la </a:t>
-            </a:r>
-            <a:r>
-              <a:rPr sz="1600" b="1" i="0">
-                <a:solidFill>
-                  <a:srgbClr val="2B2B2B"/>
-                </a:solidFill>
-                <a:latin typeface="Calibri"/>
-              </a:rPr>
-              <a:t>experiencia creativa y el análisis de datos</a:t>
-            </a:r>
-            <a:r>
-              <a:rPr sz="1600" b="0" i="0">
-                <a:solidFill>
-                  <a:srgbClr val="2B2B2B"/>
-                </a:solidFill>
-                <a:latin typeface="Calibri"/>
-              </a:rPr>
-              <a:t>: cómo convertir datos en bruto en hallazgos que respondan a sus objetivos.</a:t>
-            </a:r>
-          </a:p>
-          <a:p>
-            <a:pPr lvl="1">
+              <a:t> una comunidad de práctica: personas distintas trabajando el mismo oficio de investigar.</a:t>
+            </a:r>
+          </a:p>
+          <a:p>
+            <a:pPr>
               <a:spcAft>
-                <a:spcPts val="600"/>
+                <a:spcPts val="1000"/>
               </a:spcAft>
             </a:pPr>
             <a:r>
-              <a:rPr sz="1500" b="0" i="0">
-                <a:solidFill>
-                  <a:srgbClr val="2B2B2B"/>
-                </a:solidFill>
-                <a:latin typeface="Calibri"/>
-              </a:rPr>
-              <a:t>●   Llegue con lo que haya recogido con su instrumento, aunque sean pocos registros: con eso se trabaja.</a:t>
+              <a:rPr sz="1600" b="0" i="0">
+                <a:solidFill>
+                  <a:srgbClr val="2B2B2B"/>
+                </a:solidFill>
+                <a:latin typeface="Calibri"/>
+              </a:rPr>
+              <a:t>–   El reto de la sesión: </a:t>
+            </a:r>
+            <a:r>
+              <a:rPr sz="1600" b="1" i="0">
+                <a:solidFill>
+                  <a:srgbClr val="2B2B2B"/>
+                </a:solidFill>
+                <a:latin typeface="Calibri"/>
+              </a:rPr>
+              <a:t>nutrirse sin perder autoría</a:t>
+            </a:r>
+            <a:r>
+              <a:rPr sz="1600" b="0" i="0">
+                <a:solidFill>
+                  <a:srgbClr val="2B2B2B"/>
+                </a:solidFill>
+                <a:latin typeface="Calibri"/>
+              </a:rPr>
+              <a:t>. Recibir mucho, registrar todo, seguir siendo el autor.</a:t>
             </a:r>
           </a:p>
         </p:txBody>
@@ -7736,7 +8120,41 @@
                 </a:solidFill>
                 <a:latin typeface="Calibri"/>
               </a:rPr>
-              <a:t>19</a:t>
+              <a:t>2</a:t>
+            </a:r>
+          </a:p>
+        </p:txBody>
+      </p:sp>
+      <p:sp>
+        <p:nvSpPr>
+          <p:cNvPr id="6" name="TextBox 5"/>
+          <p:cNvSpPr txBox="1"/>
+          <p:nvPr/>
+        </p:nvSpPr>
+        <p:spPr>
+          <a:xfrm>
+            <a:off x="640080" y="5943600"/>
+            <a:ext cx="9997135" cy="457200"/>
+          </a:xfrm>
+          <a:prstGeom prst="rect">
+            <a:avLst/>
+          </a:prstGeom>
+          <a:noFill/>
+        </p:spPr>
+        <p:txBody>
+          <a:bodyPr wrap="square" anchor="t" lIns="0" rIns="0" tIns="0" bIns="0">
+            <a:spAutoFit/>
+          </a:bodyPr>
+          <a:lstStyle/>
+          <a:p>
+            <a:r>
+              <a:rPr sz="1200" b="0" i="1">
+                <a:solidFill>
+                  <a:srgbClr val="2B2B2B"/>
+                </a:solidFill>
+                <a:latin typeface="Calibri"/>
+              </a:rPr>
+              <a:t>Traiga su avance a la mano —matriz, instrumento o prototipo—: hoy se muestra, no se cuenta.</a:t>
             </a:r>
           </a:p>
         </p:txBody>
@@ -7749,7 +8167,7 @@
 </p:sld>
 </file>
 
-<file path=ppt/slides/slide2.xml><?xml version="1.0" encoding="utf-8"?>
+<file path=ppt/slides/slide20.xml><?xml version="1.0" encoding="utf-8"?>
 <p:sld xmlns:a="http://schemas.openxmlformats.org/drawingml/2006/main" xmlns:p="http://schemas.openxmlformats.org/presentationml/2006/main" xmlns:r="http://schemas.openxmlformats.org/officeDocument/2006/relationships">
   <p:cSld>
     <p:bg>
@@ -7841,7 +8259,7 @@
                 </a:solidFill>
                 <a:latin typeface="Calibri"/>
               </a:rPr>
-              <a:t>El aislamiento es el peor enemigo del trabajo de grado</a:t>
+              <a:t>Para continuar — trabajo autónomo</a:t>
             </a:r>
           </a:p>
         </p:txBody>
@@ -7880,7 +8298,7 @@
                 </a:solidFill>
                 <a:latin typeface="Calibri"/>
               </a:rPr>
-              <a:t>–   Hoy cambiamos de ritmo: su proyecto </a:t>
+              <a:t>–   </a:t>
             </a:r>
             <a:r>
               <a:rPr sz="1600" b="1" i="0">
@@ -7889,7 +8307,7 @@
                 </a:solidFill>
                 <a:latin typeface="Calibri"/>
               </a:rPr>
-              <a:t>sale de la burbuja</a:t>
+              <a:t>Suba</a:t>
             </a:r>
             <a:r>
               <a:rPr sz="1600" b="0" i="0">
@@ -7898,7 +8316,43 @@
                 </a:solidFill>
                 <a:latin typeface="Calibri"/>
               </a:rPr>
-              <a:t> y se expone a otros ojos.</a:t>
+              <a:t> `S06_CoCreacion_Apellido` con su bitácora a </a:t>
+            </a:r>
+            <a:r>
+              <a:rPr sz="1600" b="1" i="0">
+                <a:solidFill>
+                  <a:srgbClr val="2B2B2B"/>
+                </a:solidFill>
+                <a:latin typeface="Calibri"/>
+              </a:rPr>
+              <a:t>CDigital</a:t>
+            </a:r>
+            <a:r>
+              <a:rPr sz="1600" b="0" i="0">
+                <a:solidFill>
+                  <a:srgbClr val="2B2B2B"/>
+                </a:solidFill>
+                <a:latin typeface="Calibri"/>
+              </a:rPr>
+              <a:t>: el aula de </a:t>
+            </a:r>
+            <a:r>
+              <a:rPr sz="1600" b="1" i="0">
+                <a:solidFill>
+                  <a:srgbClr val="2B2B2B"/>
+                </a:solidFill>
+                <a:latin typeface="Calibri"/>
+              </a:rPr>
+              <a:t>su grupo</a:t>
+            </a:r>
+            <a:r>
+              <a:rPr sz="1600" b="0" i="0">
+                <a:solidFill>
+                  <a:srgbClr val="2B2B2B"/>
+                </a:solidFill>
+                <a:latin typeface="Calibri"/>
+              </a:rPr>
+              <a:t> en CDigital</a:t>
             </a:r>
           </a:p>
           <a:p>
@@ -7914,7 +8368,7 @@
                 </a:solidFill>
                 <a:latin typeface="Calibri"/>
               </a:rPr>
-              <a:t>–   Los proyectos que se caen en la sustentación casi nunca se caen por falta de esfuerzo: se caen porque </a:t>
+              <a:t>–   </a:t>
             </a:r>
             <a:r>
               <a:rPr sz="1600" b="1" i="0">
@@ -7923,16 +8377,7 @@
                 </a:solidFill>
                 <a:latin typeface="Calibri"/>
               </a:rPr>
-              <a:t>nadie los miró antes</a:t>
-            </a:r>
-            <a:r>
-              <a:rPr sz="1600" b="0" i="0">
-                <a:solidFill>
-                  <a:srgbClr val="2B2B2B"/>
-                </a:solidFill>
-                <a:latin typeface="Calibri"/>
-              </a:rPr>
-              <a:t>.</a:t>
+              <a:t>Trabajo autónomo (extensión de la sesión):</a:t>
             </a:r>
           </a:p>
           <a:p>
@@ -7948,7 +8393,127 @@
                 </a:solidFill>
                 <a:latin typeface="Calibri"/>
               </a:rPr>
-              <a:t>●   El autor deja de ver los huecos de su propio texto después de la tercera lectura. Es un efecto conocido y le pasa a todo el mundo.</a:t>
+              <a:t>●   </a:t>
+            </a:r>
+            <a:r>
+              <a:rPr sz="1500" b="1" i="0">
+                <a:solidFill>
+                  <a:srgbClr val="2B2B2B"/>
+                </a:solidFill>
+                <a:latin typeface="Calibri"/>
+              </a:rPr>
+              <a:t>Aplique de verdad</a:t>
+            </a:r>
+            <a:r>
+              <a:rPr sz="1500" b="0" i="0">
+                <a:solidFill>
+                  <a:srgbClr val="2B2B2B"/>
+                </a:solidFill>
+                <a:latin typeface="Calibri"/>
+              </a:rPr>
+              <a:t> los aportes que marcó como "adopto" o "adapto". Una bitácora sin cambios en el documento es papel mojado.</a:t>
+            </a:r>
+          </a:p>
+          <a:p>
+            <a:pPr lvl="1">
+              <a:spcAft>
+                <a:spcPts val="600"/>
+              </a:spcAft>
+            </a:pPr>
+            <a:r>
+              <a:rPr sz="1500" b="0" i="0">
+                <a:solidFill>
+                  <a:srgbClr val="2B2B2B"/>
+                </a:solidFill>
+                <a:latin typeface="Calibri"/>
+              </a:rPr>
+              <a:t>●   Busque </a:t>
+            </a:r>
+            <a:r>
+              <a:rPr sz="1500" b="1" i="0">
+                <a:solidFill>
+                  <a:srgbClr val="2B2B2B"/>
+                </a:solidFill>
+                <a:latin typeface="Calibri"/>
+              </a:rPr>
+              <a:t>una persona externa al curso</a:t>
+            </a:r>
+            <a:r>
+              <a:rPr sz="1500" b="0" i="0">
+                <a:solidFill>
+                  <a:srgbClr val="2B2B2B"/>
+                </a:solidFill>
+                <a:latin typeface="Calibri"/>
+              </a:rPr>
+              <a:t> —del área donde investiga, o de otro semestre— y repítale el pitch de 3 minutos. El feedback de afuera es distinto.</a:t>
+            </a:r>
+          </a:p>
+          <a:p>
+            <a:pPr lvl="1">
+              <a:spcAft>
+                <a:spcPts val="600"/>
+              </a:spcAft>
+            </a:pPr>
+            <a:r>
+              <a:rPr sz="1500" b="0" i="0">
+                <a:solidFill>
+                  <a:srgbClr val="2B2B2B"/>
+                </a:solidFill>
+                <a:latin typeface="Calibri"/>
+              </a:rPr>
+              <a:t>●   Deje la bitácora </a:t>
+            </a:r>
+            <a:r>
+              <a:rPr sz="1500" b="1" i="0">
+                <a:solidFill>
+                  <a:srgbClr val="2B2B2B"/>
+                </a:solidFill>
+                <a:latin typeface="Calibri"/>
+              </a:rPr>
+              <a:t>abierta y viva</a:t>
+            </a:r>
+            <a:r>
+              <a:rPr sz="1500" b="0" i="0">
+                <a:solidFill>
+                  <a:srgbClr val="2B2B2B"/>
+                </a:solidFill>
+                <a:latin typeface="Calibri"/>
+              </a:rPr>
+              <a:t>: cada vez que reciba un aporte de aquí en adelante, agregue una fila.</a:t>
+            </a:r>
+          </a:p>
+          <a:p>
+            <a:pPr lvl="1">
+              <a:spcAft>
+                <a:spcPts val="600"/>
+              </a:spcAft>
+            </a:pPr>
+            <a:r>
+              <a:rPr sz="1500" b="0" i="0">
+                <a:solidFill>
+                  <a:srgbClr val="2B2B2B"/>
+                </a:solidFill>
+                <a:latin typeface="Calibri"/>
+              </a:rPr>
+              <a:t>●   Si su marco lo permite, busque en Google Académico </a:t>
+            </a:r>
+            <a:r>
+              <a:rPr sz="1500" b="1" i="0">
+                <a:solidFill>
+                  <a:srgbClr val="2B2B2B"/>
+                </a:solidFill>
+                <a:latin typeface="Calibri"/>
+              </a:rPr>
+              <a:t>un referente sobre comunidades de práctica o co-creación</a:t>
+            </a:r>
+            <a:r>
+              <a:rPr sz="1500" b="0" i="0">
+                <a:solidFill>
+                  <a:srgbClr val="2B2B2B"/>
+                </a:solidFill>
+                <a:latin typeface="Calibri"/>
+              </a:rPr>
+              <a:t> y agréguelo a sus fichas.</a:t>
             </a:r>
           </a:p>
           <a:p>
@@ -7964,7 +8529,43 @@
                 </a:solidFill>
                 <a:latin typeface="Calibri"/>
               </a:rPr>
-              <a:t>–   Un compañero que no conoce su tema detecta en tres minutos lo que usted no vio en tres semanas.</a:t>
+              <a:t>–   </a:t>
+            </a:r>
+            <a:r>
+              <a:rPr sz="1600" b="1" i="0">
+                <a:solidFill>
+                  <a:srgbClr val="2B2B2B"/>
+                </a:solidFill>
+                <a:latin typeface="Calibri"/>
+              </a:rPr>
+              <a:t>En la próxima sesión</a:t>
+            </a:r>
+            <a:r>
+              <a:rPr sz="1600" b="0" i="0">
+                <a:solidFill>
+                  <a:srgbClr val="2B2B2B"/>
+                </a:solidFill>
+                <a:latin typeface="Calibri"/>
+              </a:rPr>
+              <a:t> pasamos a la </a:t>
+            </a:r>
+            <a:r>
+              <a:rPr sz="1600" b="1" i="0">
+                <a:solidFill>
+                  <a:srgbClr val="2B2B2B"/>
+                </a:solidFill>
+                <a:latin typeface="Calibri"/>
+              </a:rPr>
+              <a:t>experiencia creativa y el análisis de datos</a:t>
+            </a:r>
+            <a:r>
+              <a:rPr sz="1600" b="0" i="0">
+                <a:solidFill>
+                  <a:srgbClr val="2B2B2B"/>
+                </a:solidFill>
+                <a:latin typeface="Calibri"/>
+              </a:rPr>
+              <a:t>: cómo convertir datos en bruto en hallazgos que respondan a sus objetivos.</a:t>
             </a:r>
           </a:p>
           <a:p>
@@ -7980,75 +8581,7 @@
                 </a:solidFill>
                 <a:latin typeface="Calibri"/>
               </a:rPr>
-              <a:t>●   "No entendí qué mide su instrumento" dicho hoy vale oro; dicho por un jurado, cuesta la nota.</a:t>
-            </a:r>
-          </a:p>
-          <a:p>
-            <a:pPr>
-              <a:spcAft>
-                <a:spcPts val="1000"/>
-              </a:spcAft>
-            </a:pPr>
-            <a:r>
-              <a:rPr sz="1600" b="0" i="0">
-                <a:solidFill>
-                  <a:srgbClr val="2B2B2B"/>
-                </a:solidFill>
-                <a:latin typeface="Calibri"/>
-              </a:rPr>
-              <a:t>–   El grupo de este curso </a:t>
-            </a:r>
-            <a:r>
-              <a:rPr sz="1600" b="1" i="0">
-                <a:solidFill>
-                  <a:srgbClr val="2B2B2B"/>
-                </a:solidFill>
-                <a:latin typeface="Calibri"/>
-              </a:rPr>
-              <a:t>es</a:t>
-            </a:r>
-            <a:r>
-              <a:rPr sz="1600" b="0" i="0">
-                <a:solidFill>
-                  <a:srgbClr val="2B2B2B"/>
-                </a:solidFill>
-                <a:latin typeface="Calibri"/>
-              </a:rPr>
-              <a:t> una comunidad de práctica: personas distintas trabajando el mismo oficio de investigar.</a:t>
-            </a:r>
-          </a:p>
-          <a:p>
-            <a:pPr>
-              <a:spcAft>
-                <a:spcPts val="1000"/>
-              </a:spcAft>
-            </a:pPr>
-            <a:r>
-              <a:rPr sz="1600" b="0" i="0">
-                <a:solidFill>
-                  <a:srgbClr val="2B2B2B"/>
-                </a:solidFill>
-                <a:latin typeface="Calibri"/>
-              </a:rPr>
-              <a:t>–   El reto de la sesión: </a:t>
-            </a:r>
-            <a:r>
-              <a:rPr sz="1600" b="1" i="0">
-                <a:solidFill>
-                  <a:srgbClr val="2B2B2B"/>
-                </a:solidFill>
-                <a:latin typeface="Calibri"/>
-              </a:rPr>
-              <a:t>nutrirse sin perder autoría</a:t>
-            </a:r>
-            <a:r>
-              <a:rPr sz="1600" b="0" i="0">
-                <a:solidFill>
-                  <a:srgbClr val="2B2B2B"/>
-                </a:solidFill>
-                <a:latin typeface="Calibri"/>
-              </a:rPr>
-              <a:t>. Recibir mucho, registrar todo, seguir siendo el autor.</a:t>
+              <a:t>●   Llegue con lo que haya recogido con su instrumento, aunque sean pocos registros: con eso se trabaja.</a:t>
             </a:r>
           </a:p>
         </p:txBody>
@@ -8083,41 +8616,7 @@
                 </a:solidFill>
                 <a:latin typeface="Calibri"/>
               </a:rPr>
-              <a:t>2</a:t>
-            </a:r>
-          </a:p>
-        </p:txBody>
-      </p:sp>
-      <p:sp>
-        <p:nvSpPr>
-          <p:cNvPr id="6" name="TextBox 5"/>
-          <p:cNvSpPr txBox="1"/>
-          <p:nvPr/>
-        </p:nvSpPr>
-        <p:spPr>
-          <a:xfrm>
-            <a:off x="640080" y="5943600"/>
-            <a:ext cx="9997135" cy="457200"/>
-          </a:xfrm>
-          <a:prstGeom prst="rect">
-            <a:avLst/>
-          </a:prstGeom>
-          <a:noFill/>
-        </p:spPr>
-        <p:txBody>
-          <a:bodyPr wrap="square" anchor="t" lIns="0" rIns="0" tIns="0" bIns="0">
-            <a:spAutoFit/>
-          </a:bodyPr>
-          <a:lstStyle/>
-          <a:p>
-            <a:r>
-              <a:rPr sz="1200" b="0" i="1">
-                <a:solidFill>
-                  <a:srgbClr val="2B2B2B"/>
-                </a:solidFill>
-                <a:latin typeface="Calibri"/>
-              </a:rPr>
-              <a:t>Traiga su avance a la mano —matriz, instrumento o prototipo—: hoy se muestra, no se cuenta.</a:t>
+              <a:t>20</a:t>
             </a:r>
           </a:p>
         </p:txBody>
@@ -8130,7 +8629,1215 @@
 </p:sld>
 </file>
 
-<file path=ppt/slides/slide20.xml><?xml version="1.0" encoding="utf-8"?>
+<file path=ppt/slides/slide21.xml><?xml version="1.0" encoding="utf-8"?>
+<p:sld xmlns:a="http://schemas.openxmlformats.org/drawingml/2006/main" xmlns:p="http://schemas.openxmlformats.org/presentationml/2006/main" xmlns:r="http://schemas.openxmlformats.org/officeDocument/2006/relationships">
+  <p:cSld>
+    <p:bg>
+      <p:bgPr>
+        <a:solidFill>
+          <a:srgbClr val="FFFFFF"/>
+        </a:solidFill>
+        <a:effectLst/>
+      </p:bgPr>
+    </p:bg>
+    <p:spTree>
+      <p:nvGrpSpPr>
+        <p:cNvPr id="1" name=""/>
+        <p:cNvGrpSpPr/>
+        <p:nvPr/>
+      </p:nvGrpSpPr>
+      <p:grpSpPr/>
+      <p:sp>
+        <p:nvSpPr>
+          <p:cNvPr id="2" name="Rectangle 1"/>
+          <p:cNvSpPr/>
+          <p:nvPr/>
+        </p:nvSpPr>
+        <p:spPr>
+          <a:xfrm>
+            <a:off x="0" y="0"/>
+            <a:ext cx="12191695" cy="1188720"/>
+          </a:xfrm>
+          <a:prstGeom prst="rect">
+            <a:avLst/>
+          </a:prstGeom>
+          <a:solidFill>
+            <a:srgbClr val="0C2340"/>
+          </a:solidFill>
+          <a:ln>
+            <a:noFill/>
+          </a:ln>
+          <a:effectLst/>
+        </p:spPr>
+        <p:style>
+          <a:lnRef idx="1">
+            <a:schemeClr val="accent1"/>
+          </a:lnRef>
+          <a:fillRef idx="3">
+            <a:schemeClr val="accent1"/>
+          </a:fillRef>
+          <a:effectRef idx="2">
+            <a:schemeClr val="accent1"/>
+          </a:effectRef>
+          <a:fontRef idx="minor">
+            <a:schemeClr val="lt1"/>
+          </a:fontRef>
+        </p:style>
+        <p:txBody>
+          <a:bodyPr rtlCol="0" anchor="ctr"/>
+          <a:lstStyle/>
+          <a:p>
+            <a:pPr algn="ctr"/>
+          </a:p>
+        </p:txBody>
+      </p:sp>
+      <p:sp>
+        <p:nvSpPr>
+          <p:cNvPr id="3" name="TextBox 2"/>
+          <p:cNvSpPr txBox="1"/>
+          <p:nvPr/>
+        </p:nvSpPr>
+        <p:spPr>
+          <a:xfrm>
+            <a:off x="640080" y="0"/>
+            <a:ext cx="9082735" cy="1188720"/>
+          </a:xfrm>
+          <a:prstGeom prst="rect">
+            <a:avLst/>
+          </a:prstGeom>
+          <a:noFill/>
+        </p:spPr>
+        <p:txBody>
+          <a:bodyPr wrap="square" anchor="ctr" lIns="0" rIns="0" tIns="0" bIns="0">
+            <a:spAutoFit/>
+          </a:bodyPr>
+          <a:lstStyle/>
+          <a:p>
+            <a:pPr algn="ctr"/>
+            <a:r>
+              <a:rPr sz="2600" b="1" i="0">
+                <a:solidFill>
+                  <a:srgbClr val="FFFFFF"/>
+                </a:solidFill>
+                <a:latin typeface="Calibri"/>
+              </a:rPr>
+              <a:t>RUTA DE ENTREGABLES DEL CURSO</a:t>
+            </a:r>
+          </a:p>
+        </p:txBody>
+      </p:sp>
+      <p:sp>
+        <p:nvSpPr>
+          <p:cNvPr id="4" name="TextBox 3"/>
+          <p:cNvSpPr txBox="1"/>
+          <p:nvPr/>
+        </p:nvSpPr>
+        <p:spPr>
+          <a:xfrm>
+            <a:off x="640080" y="1280160"/>
+            <a:ext cx="10911535" cy="411480"/>
+          </a:xfrm>
+          <a:prstGeom prst="rect">
+            <a:avLst/>
+          </a:prstGeom>
+          <a:noFill/>
+        </p:spPr>
+        <p:txBody>
+          <a:bodyPr wrap="square" anchor="t" lIns="0" rIns="0" tIns="0" bIns="0">
+            <a:spAutoFit/>
+          </a:bodyPr>
+          <a:lstStyle/>
+          <a:p>
+            <a:pPr algn="ctr"/>
+            <a:r>
+              <a:rPr sz="1500" b="0" i="0">
+                <a:solidFill>
+                  <a:srgbClr val="2B2B2B"/>
+                </a:solidFill>
+                <a:latin typeface="Calibri"/>
+              </a:rPr>
+              <a:t>Sin fechas a propósito: aquí va </a:t>
+            </a:r>
+            <a:r>
+              <a:rPr sz="1500" b="1" i="0">
+                <a:solidFill>
+                  <a:srgbClr val="2B2B2B"/>
+                </a:solidFill>
+                <a:latin typeface="Calibri"/>
+              </a:rPr>
+              <a:t>en qué punto del curso</a:t>
+            </a:r>
+            <a:r>
+              <a:rPr sz="1500" b="0" i="0">
+                <a:solidFill>
+                  <a:srgbClr val="2B2B2B"/>
+                </a:solidFill>
+                <a:latin typeface="Calibri"/>
+              </a:rPr>
+              <a:t> cierra cada ítem · la ventana exacta la fija CDigital</a:t>
+            </a:r>
+          </a:p>
+        </p:txBody>
+      </p:sp>
+      <p:graphicFrame>
+        <p:nvGraphicFramePr>
+          <p:cNvPr id="5" name="Table 4"/>
+          <p:cNvGraphicFramePr>
+            <a:graphicFrameLocks noGrp="1"/>
+          </p:cNvGraphicFramePr>
+          <p:nvPr/>
+        </p:nvGraphicFramePr>
+        <p:xfrm>
+          <a:off x="640080" y="2011679"/>
+          <a:ext cx="10911533" cy="4297680"/>
+        </p:xfrm>
+        <a:graphic>
+          <a:graphicData uri="http://schemas.openxmlformats.org/drawingml/2006/table">
+            <a:tbl>
+              <a:tblPr>
+                <a:tableStyleId>{2D5ABB26-0587-4C30-8999-92F81FD0307C}</a:tableStyleId>
+              </a:tblPr>
+              <a:tblGrid>
+                <a:gridCol w="2659113"/>
+                <a:gridCol w="2659113"/>
+                <a:gridCol w="5593307"/>
+              </a:tblGrid>
+              <a:tr h="477520">
+                <a:tc>
+                  <a:txBody>
+                    <a:bodyPr/>
+                    <a:lstStyle/>
+                    <a:p>
+                      <a:pPr algn="l"/>
+                      <a:r>
+                        <a:rPr sz="1300" b="1" i="0">
+                          <a:solidFill>
+                            <a:srgbClr val="FFFFFF"/>
+                          </a:solidFill>
+                          <a:latin typeface="Calibri"/>
+                        </a:rPr>
+                        <a:t>Cierra en la semana de…</a:t>
+                      </a:r>
+                    </a:p>
+                  </a:txBody>
+                  <a:tcPr anchor="ctr" marL="109728" marR="91440" marT="36576" marB="36576">
+                    <a:solidFill>
+                      <a:srgbClr val="0C2340"/>
+                    </a:solidFill>
+                  </a:tcPr>
+                </a:tc>
+                <a:tc>
+                  <a:txBody>
+                    <a:bodyPr/>
+                    <a:lstStyle/>
+                    <a:p>
+                      <a:pPr algn="l"/>
+                      <a:r>
+                        <a:rPr sz="1300" b="1" i="0">
+                          <a:solidFill>
+                            <a:srgbClr val="FFFFFF"/>
+                          </a:solidFill>
+                          <a:latin typeface="Calibri"/>
+                        </a:rPr>
+                        <a:t>Entregable</a:t>
+                      </a:r>
+                    </a:p>
+                  </a:txBody>
+                  <a:tcPr anchor="ctr" marL="109728" marR="91440" marT="36576" marB="36576">
+                    <a:solidFill>
+                      <a:srgbClr val="0C2340"/>
+                    </a:solidFill>
+                  </a:tcPr>
+                </a:tc>
+                <a:tc>
+                  <a:txBody>
+                    <a:bodyPr/>
+                    <a:lstStyle/>
+                    <a:p>
+                      <a:pPr algn="l"/>
+                      <a:r>
+                        <a:rPr sz="1300" b="1" i="0">
+                          <a:solidFill>
+                            <a:srgbClr val="FFFFFF"/>
+                          </a:solidFill>
+                          <a:latin typeface="Calibri"/>
+                        </a:rPr>
+                        <a:t>Qué debes tener listo</a:t>
+                      </a:r>
+                    </a:p>
+                  </a:txBody>
+                  <a:tcPr anchor="ctr" marL="109728" marR="91440" marT="36576" marB="36576">
+                    <a:solidFill>
+                      <a:srgbClr val="0C2340"/>
+                    </a:solidFill>
+                  </a:tcPr>
+                </a:tc>
+              </a:tr>
+              <a:tr h="477520">
+                <a:tc>
+                  <a:txBody>
+                    <a:bodyPr/>
+                    <a:lstStyle/>
+                    <a:p>
+                      <a:pPr algn="l"/>
+                      <a:r>
+                        <a:rPr sz="1100" b="1" i="0">
+                          <a:solidFill>
+                            <a:srgbClr val="2B2B2B"/>
+                          </a:solidFill>
+                          <a:latin typeface="Calibri"/>
+                        </a:rPr>
+                        <a:t>Sesión 03</a:t>
+                      </a:r>
+                      <a:r>
+                        <a:rPr sz="1100" b="0" i="0">
+                          <a:solidFill>
+                            <a:srgbClr val="2B2B2B"/>
+                          </a:solidFill>
+                          <a:latin typeface="Calibri"/>
+                        </a:rPr>
+                        <a:t> · ya cerró</a:t>
+                      </a:r>
+                    </a:p>
+                  </a:txBody>
+                  <a:tcPr anchor="ctr" marL="109728" marR="91440" marT="36576" marB="36576">
+                    <a:solidFill>
+                      <a:srgbClr val="FFFFFF"/>
+                    </a:solidFill>
+                  </a:tcPr>
+                </a:tc>
+                <a:tc>
+                  <a:txBody>
+                    <a:bodyPr/>
+                    <a:lstStyle/>
+                    <a:p>
+                      <a:pPr algn="l"/>
+                      <a:r>
+                        <a:rPr sz="1100" b="1" i="0">
+                          <a:solidFill>
+                            <a:srgbClr val="2B2B2B"/>
+                          </a:solidFill>
+                          <a:latin typeface="Calibri"/>
+                        </a:rPr>
+                        <a:t>Quiz 1</a:t>
+                      </a:r>
+                      <a:r>
+                        <a:rPr sz="1100" b="0" i="0">
+                          <a:solidFill>
+                            <a:srgbClr val="2B2B2B"/>
+                          </a:solidFill>
+                          <a:latin typeface="Calibri"/>
+                        </a:rPr>
+                        <a:t> · Cuestionario · 6%</a:t>
+                      </a:r>
+                    </a:p>
+                  </a:txBody>
+                  <a:tcPr anchor="ctr" marL="109728" marR="91440" marT="36576" marB="36576">
+                    <a:solidFill>
+                      <a:srgbClr val="FFFFFF"/>
+                    </a:solidFill>
+                  </a:tcPr>
+                </a:tc>
+                <a:tc>
+                  <a:txBody>
+                    <a:bodyPr/>
+                    <a:lstStyle/>
+                    <a:p>
+                      <a:pPr algn="l"/>
+                      <a:r>
+                        <a:rPr sz="1100" b="0" i="0">
+                          <a:solidFill>
+                            <a:srgbClr val="2B2B2B"/>
+                          </a:solidFill>
+                          <a:latin typeface="Calibri"/>
+                        </a:rPr>
+                        <a:t>Repasa </a:t>
+                      </a:r>
+                      <a:r>
+                        <a:rPr sz="1100" b="1" i="0">
+                          <a:solidFill>
+                            <a:srgbClr val="2B2B2B"/>
+                          </a:solidFill>
+                          <a:latin typeface="Calibri"/>
+                        </a:rPr>
+                        <a:t>pregunta, objetivos y título</a:t>
+                      </a:r>
+                      <a:r>
+                        <a:rPr sz="1100" b="0" i="0">
+                          <a:solidFill>
+                            <a:srgbClr val="2B2B2B"/>
+                          </a:solidFill>
+                          <a:latin typeface="Calibri"/>
+                        </a:rPr>
+                        <a:t> y las variables de la pregunta-problema.</a:t>
+                      </a:r>
+                    </a:p>
+                  </a:txBody>
+                  <a:tcPr anchor="ctr" marL="109728" marR="91440" marT="36576" marB="36576">
+                    <a:solidFill>
+                      <a:srgbClr val="FFFFFF"/>
+                    </a:solidFill>
+                  </a:tcPr>
+                </a:tc>
+              </a:tr>
+              <a:tr h="477520">
+                <a:tc>
+                  <a:txBody>
+                    <a:bodyPr/>
+                    <a:lstStyle/>
+                    <a:p>
+                      <a:pPr algn="l"/>
+                      <a:r>
+                        <a:rPr sz="1100" b="1" i="0">
+                          <a:solidFill>
+                            <a:srgbClr val="2B2B2B"/>
+                          </a:solidFill>
+                          <a:latin typeface="Calibri"/>
+                        </a:rPr>
+                        <a:t>Sesión 06</a:t>
+                      </a:r>
+                      <a:r>
+                        <a:rPr sz="1100" b="0" i="0">
+                          <a:solidFill>
+                            <a:srgbClr val="2B2B2B"/>
+                          </a:solidFill>
+                          <a:latin typeface="Calibri"/>
+                        </a:rPr>
+                        <a:t> · cierra esta semana</a:t>
+                      </a:r>
+                    </a:p>
+                  </a:txBody>
+                  <a:tcPr anchor="ctr" marL="109728" marR="91440" marT="36576" marB="36576">
+                    <a:solidFill>
+                      <a:srgbClr val="F2F2F2"/>
+                    </a:solidFill>
+                  </a:tcPr>
+                </a:tc>
+                <a:tc>
+                  <a:txBody>
+                    <a:bodyPr/>
+                    <a:lstStyle/>
+                    <a:p>
+                      <a:pPr algn="l"/>
+                      <a:r>
+                        <a:rPr sz="1100" b="1" i="0">
+                          <a:solidFill>
+                            <a:srgbClr val="2B2B2B"/>
+                          </a:solidFill>
+                          <a:latin typeface="Calibri"/>
+                        </a:rPr>
+                        <a:t>Parcial 1</a:t>
+                      </a:r>
+                      <a:r>
+                        <a:rPr sz="1100" b="0" i="0">
+                          <a:solidFill>
+                            <a:srgbClr val="2B2B2B"/>
+                          </a:solidFill>
+                          <a:latin typeface="Calibri"/>
+                        </a:rPr>
+                        <a:t> · Cuestionario · 24%</a:t>
+                      </a:r>
+                    </a:p>
+                  </a:txBody>
+                  <a:tcPr anchor="ctr" marL="109728" marR="91440" marT="36576" marB="36576">
+                    <a:solidFill>
+                      <a:srgbClr val="F2F2F2"/>
+                    </a:solidFill>
+                  </a:tcPr>
+                </a:tc>
+                <a:tc>
+                  <a:txBody>
+                    <a:bodyPr/>
+                    <a:lstStyle/>
+                    <a:p>
+                      <a:pPr algn="l"/>
+                      <a:r>
+                        <a:rPr sz="1100" b="0" i="0">
+                          <a:solidFill>
+                            <a:srgbClr val="2B2B2B"/>
+                          </a:solidFill>
+                          <a:latin typeface="Calibri"/>
+                        </a:rPr>
+                        <a:t>Estudia la </a:t>
+                      </a:r>
+                      <a:r>
+                        <a:rPr sz="1100" b="1" i="0">
+                          <a:solidFill>
+                            <a:srgbClr val="2B2B2B"/>
+                          </a:solidFill>
+                          <a:latin typeface="Calibri"/>
+                        </a:rPr>
+                        <a:t>introducción</a:t>
+                      </a:r>
+                      <a:r>
+                        <a:rPr sz="1100" b="0" i="0">
+                          <a:solidFill>
+                            <a:srgbClr val="2B2B2B"/>
+                          </a:solidFill>
+                          <a:latin typeface="Calibri"/>
+                        </a:rPr>
+                        <a:t>, los referentes Fase I y el instrumento ya diseñado.</a:t>
+                      </a:r>
+                    </a:p>
+                  </a:txBody>
+                  <a:tcPr anchor="ctr" marL="109728" marR="91440" marT="36576" marB="36576">
+                    <a:solidFill>
+                      <a:srgbClr val="F2F2F2"/>
+                    </a:solidFill>
+                  </a:tcPr>
+                </a:tc>
+              </a:tr>
+              <a:tr h="477520">
+                <a:tc>
+                  <a:txBody>
+                    <a:bodyPr/>
+                    <a:lstStyle/>
+                    <a:p>
+                      <a:pPr algn="l"/>
+                      <a:r>
+                        <a:rPr sz="1100" b="1" i="0">
+                          <a:solidFill>
+                            <a:srgbClr val="2B2B2B"/>
+                          </a:solidFill>
+                          <a:latin typeface="Calibri"/>
+                        </a:rPr>
+                        <a:t>Sesión 08</a:t>
+                      </a:r>
+                      <a:r>
+                        <a:rPr sz="1100" b="0" i="0">
+                          <a:solidFill>
+                            <a:srgbClr val="2B2B2B"/>
+                          </a:solidFill>
+                          <a:latin typeface="Calibri"/>
+                        </a:rPr>
+                        <a:t> · pendiente</a:t>
+                      </a:r>
+                    </a:p>
+                  </a:txBody>
+                  <a:tcPr anchor="ctr" marL="109728" marR="91440" marT="36576" marB="36576">
+                    <a:solidFill>
+                      <a:srgbClr val="FFFFFF"/>
+                    </a:solidFill>
+                  </a:tcPr>
+                </a:tc>
+                <a:tc>
+                  <a:txBody>
+                    <a:bodyPr/>
+                    <a:lstStyle/>
+                    <a:p>
+                      <a:pPr algn="l"/>
+                      <a:r>
+                        <a:rPr sz="1100" b="1" i="0">
+                          <a:solidFill>
+                            <a:srgbClr val="2B2B2B"/>
+                          </a:solidFill>
+                          <a:latin typeface="Calibri"/>
+                        </a:rPr>
+                        <a:t>Quiz 2</a:t>
+                      </a:r>
+                      <a:r>
+                        <a:rPr sz="1100" b="0" i="0">
+                          <a:solidFill>
+                            <a:srgbClr val="2B2B2B"/>
+                          </a:solidFill>
+                          <a:latin typeface="Calibri"/>
+                        </a:rPr>
+                        <a:t> · Cuestionario · 9%</a:t>
+                      </a:r>
+                    </a:p>
+                  </a:txBody>
+                  <a:tcPr anchor="ctr" marL="109728" marR="91440" marT="36576" marB="36576">
+                    <a:solidFill>
+                      <a:srgbClr val="FFFFFF"/>
+                    </a:solidFill>
+                  </a:tcPr>
+                </a:tc>
+                <a:tc>
+                  <a:txBody>
+                    <a:bodyPr/>
+                    <a:lstStyle/>
+                    <a:p>
+                      <a:pPr algn="l"/>
+                      <a:r>
+                        <a:rPr sz="1100" b="0" i="0">
+                          <a:solidFill>
+                            <a:srgbClr val="2B2B2B"/>
+                          </a:solidFill>
+                          <a:latin typeface="Calibri"/>
+                        </a:rPr>
+                        <a:t>Estudia </a:t>
+                      </a:r>
+                      <a:r>
+                        <a:rPr sz="1100" b="1" i="0">
+                          <a:solidFill>
+                            <a:srgbClr val="2B2B2B"/>
+                          </a:solidFill>
+                          <a:latin typeface="Calibri"/>
+                        </a:rPr>
+                        <a:t>comunidades de práctica</a:t>
+                      </a:r>
+                      <a:r>
+                        <a:rPr sz="1100" b="0" i="0">
+                          <a:solidFill>
+                            <a:srgbClr val="2B2B2B"/>
+                          </a:solidFill>
+                          <a:latin typeface="Calibri"/>
+                        </a:rPr>
+                        <a:t>, co-creación y análisis de datos.</a:t>
+                      </a:r>
+                    </a:p>
+                  </a:txBody>
+                  <a:tcPr anchor="ctr" marL="109728" marR="91440" marT="36576" marB="36576">
+                    <a:solidFill>
+                      <a:srgbClr val="FFFFFF"/>
+                    </a:solidFill>
+                  </a:tcPr>
+                </a:tc>
+              </a:tr>
+              <a:tr h="477520">
+                <a:tc>
+                  <a:txBody>
+                    <a:bodyPr/>
+                    <a:lstStyle/>
+                    <a:p>
+                      <a:pPr algn="l"/>
+                      <a:r>
+                        <a:rPr sz="1100" b="1" i="0">
+                          <a:solidFill>
+                            <a:srgbClr val="2B2B2B"/>
+                          </a:solidFill>
+                          <a:latin typeface="Calibri"/>
+                        </a:rPr>
+                        <a:t>Sesión 10</a:t>
+                      </a:r>
+                      <a:r>
+                        <a:rPr sz="1100" b="0" i="0">
+                          <a:solidFill>
+                            <a:srgbClr val="2B2B2B"/>
+                          </a:solidFill>
+                          <a:latin typeface="Calibri"/>
+                        </a:rPr>
+                        <a:t> · pendiente</a:t>
+                      </a:r>
+                    </a:p>
+                  </a:txBody>
+                  <a:tcPr anchor="ctr" marL="109728" marR="91440" marT="36576" marB="36576">
+                    <a:solidFill>
+                      <a:srgbClr val="F2F2F2"/>
+                    </a:solidFill>
+                  </a:tcPr>
+                </a:tc>
+                <a:tc>
+                  <a:txBody>
+                    <a:bodyPr/>
+                    <a:lstStyle/>
+                    <a:p>
+                      <a:pPr algn="l"/>
+                      <a:r>
+                        <a:rPr sz="1100" b="1" i="0">
+                          <a:solidFill>
+                            <a:srgbClr val="2B2B2B"/>
+                          </a:solidFill>
+                          <a:latin typeface="Calibri"/>
+                        </a:rPr>
+                        <a:t>Parcial 2</a:t>
+                      </a:r>
+                      <a:r>
+                        <a:rPr sz="1100" b="0" i="0">
+                          <a:solidFill>
+                            <a:srgbClr val="2B2B2B"/>
+                          </a:solidFill>
+                          <a:latin typeface="Calibri"/>
+                        </a:rPr>
+                        <a:t> · Cuestionario · 21%</a:t>
+                      </a:r>
+                    </a:p>
+                  </a:txBody>
+                  <a:tcPr anchor="ctr" marL="109728" marR="91440" marT="36576" marB="36576">
+                    <a:solidFill>
+                      <a:srgbClr val="F2F2F2"/>
+                    </a:solidFill>
+                  </a:tcPr>
+                </a:tc>
+                <a:tc>
+                  <a:txBody>
+                    <a:bodyPr/>
+                    <a:lstStyle/>
+                    <a:p>
+                      <a:pPr algn="l"/>
+                      <a:r>
+                        <a:rPr sz="1100" b="0" i="0">
+                          <a:solidFill>
+                            <a:srgbClr val="2B2B2B"/>
+                          </a:solidFill>
+                          <a:latin typeface="Calibri"/>
+                        </a:rPr>
+                        <a:t>Estudia el cierre del </a:t>
+                      </a:r>
+                      <a:r>
+                        <a:rPr sz="1100" b="1" i="0">
+                          <a:solidFill>
+                            <a:srgbClr val="2B2B2B"/>
+                          </a:solidFill>
+                          <a:latin typeface="Calibri"/>
+                        </a:rPr>
+                        <a:t>marco teórico</a:t>
+                      </a:r>
+                      <a:r>
+                        <a:rPr sz="1100" b="0" i="0">
+                          <a:solidFill>
+                            <a:srgbClr val="2B2B2B"/>
+                          </a:solidFill>
+                          <a:latin typeface="Calibri"/>
+                        </a:rPr>
+                        <a:t>, los resultados y la discusión.</a:t>
+                      </a:r>
+                    </a:p>
+                  </a:txBody>
+                  <a:tcPr anchor="ctr" marL="109728" marR="91440" marT="36576" marB="36576">
+                    <a:solidFill>
+                      <a:srgbClr val="F2F2F2"/>
+                    </a:solidFill>
+                  </a:tcPr>
+                </a:tc>
+              </a:tr>
+              <a:tr h="477520">
+                <a:tc>
+                  <a:txBody>
+                    <a:bodyPr/>
+                    <a:lstStyle/>
+                    <a:p>
+                      <a:pPr algn="l"/>
+                      <a:r>
+                        <a:rPr sz="1100" b="1" i="0">
+                          <a:solidFill>
+                            <a:srgbClr val="2B2B2B"/>
+                          </a:solidFill>
+                          <a:latin typeface="Calibri"/>
+                        </a:rPr>
+                        <a:t>Sesión 12</a:t>
+                      </a:r>
+                      <a:r>
+                        <a:rPr sz="1100" b="0" i="0">
+                          <a:solidFill>
+                            <a:srgbClr val="2B2B2B"/>
+                          </a:solidFill>
+                          <a:latin typeface="Calibri"/>
+                        </a:rPr>
+                        <a:t> · pendiente</a:t>
+                      </a:r>
+                    </a:p>
+                  </a:txBody>
+                  <a:tcPr anchor="ctr" marL="109728" marR="91440" marT="36576" marB="36576">
+                    <a:solidFill>
+                      <a:srgbClr val="FFFFFF"/>
+                    </a:solidFill>
+                  </a:tcPr>
+                </a:tc>
+                <a:tc>
+                  <a:txBody>
+                    <a:bodyPr/>
+                    <a:lstStyle/>
+                    <a:p>
+                      <a:pPr algn="l"/>
+                      <a:r>
+                        <a:rPr sz="1100" b="1" i="0">
+                          <a:solidFill>
+                            <a:srgbClr val="2B2B2B"/>
+                          </a:solidFill>
+                          <a:latin typeface="Calibri"/>
+                        </a:rPr>
+                        <a:t>Quiz 3</a:t>
+                      </a:r>
+                      <a:r>
+                        <a:rPr sz="1100" b="0" i="0">
+                          <a:solidFill>
+                            <a:srgbClr val="2B2B2B"/>
+                          </a:solidFill>
+                          <a:latin typeface="Calibri"/>
+                        </a:rPr>
+                        <a:t> · Cuestionario · 4%</a:t>
+                      </a:r>
+                    </a:p>
+                  </a:txBody>
+                  <a:tcPr anchor="ctr" marL="109728" marR="91440" marT="36576" marB="36576">
+                    <a:solidFill>
+                      <a:srgbClr val="FFFFFF"/>
+                    </a:solidFill>
+                  </a:tcPr>
+                </a:tc>
+                <a:tc>
+                  <a:txBody>
+                    <a:bodyPr/>
+                    <a:lstStyle/>
+                    <a:p>
+                      <a:pPr algn="l"/>
+                      <a:r>
+                        <a:rPr sz="1100" b="0" i="0">
+                          <a:solidFill>
+                            <a:srgbClr val="2B2B2B"/>
+                          </a:solidFill>
+                          <a:latin typeface="Calibri"/>
+                        </a:rPr>
+                        <a:t>Ten claros </a:t>
+                      </a:r>
+                      <a:r>
+                        <a:rPr sz="1100" b="1" i="0">
+                          <a:solidFill>
+                            <a:srgbClr val="2B2B2B"/>
+                          </a:solidFill>
+                          <a:latin typeface="Calibri"/>
+                        </a:rPr>
+                        <a:t>resumen</a:t>
+                      </a:r>
+                      <a:r>
+                        <a:rPr sz="1100" b="0" i="0">
+                          <a:solidFill>
+                            <a:srgbClr val="2B2B2B"/>
+                          </a:solidFill>
+                          <a:latin typeface="Calibri"/>
+                        </a:rPr>
+                        <a:t>, palabras clave UNESCO, póster y verificación antiplagio.</a:t>
+                      </a:r>
+                    </a:p>
+                  </a:txBody>
+                  <a:tcPr anchor="ctr" marL="109728" marR="91440" marT="36576" marB="36576">
+                    <a:solidFill>
+                      <a:srgbClr val="FFFFFF"/>
+                    </a:solidFill>
+                  </a:tcPr>
+                </a:tc>
+              </a:tr>
+              <a:tr h="477520">
+                <a:tc>
+                  <a:txBody>
+                    <a:bodyPr/>
+                    <a:lstStyle/>
+                    <a:p>
+                      <a:pPr algn="l"/>
+                      <a:r>
+                        <a:rPr sz="1100" b="1" i="0">
+                          <a:solidFill>
+                            <a:srgbClr val="2B2B2B"/>
+                          </a:solidFill>
+                          <a:latin typeface="Calibri"/>
+                        </a:rPr>
+                        <a:t>Sesión 13</a:t>
+                      </a:r>
+                      <a:r>
+                        <a:rPr sz="1100" b="0" i="0">
+                          <a:solidFill>
+                            <a:srgbClr val="2B2B2B"/>
+                          </a:solidFill>
+                          <a:latin typeface="Calibri"/>
+                        </a:rPr>
+                        <a:t> · pendiente</a:t>
+                      </a:r>
+                    </a:p>
+                  </a:txBody>
+                  <a:tcPr anchor="ctr" marL="109728" marR="91440" marT="36576" marB="36576">
+                    <a:solidFill>
+                      <a:srgbClr val="F2F2F2"/>
+                    </a:solidFill>
+                  </a:tcPr>
+                </a:tc>
+                <a:tc>
+                  <a:txBody>
+                    <a:bodyPr/>
+                    <a:lstStyle/>
+                    <a:p>
+                      <a:pPr algn="l"/>
+                      <a:r>
+                        <a:rPr sz="1100" b="1" i="0">
+                          <a:solidFill>
+                            <a:srgbClr val="2B2B2B"/>
+                          </a:solidFill>
+                          <a:latin typeface="Calibri"/>
+                        </a:rPr>
+                        <a:t>ACA Final</a:t>
+                      </a:r>
+                      <a:r>
+                        <a:rPr sz="1100" b="0" i="0">
+                          <a:solidFill>
+                            <a:srgbClr val="2B2B2B"/>
+                          </a:solidFill>
+                          <a:latin typeface="Calibri"/>
+                        </a:rPr>
+                        <a:t> · Tarea · 32%</a:t>
+                      </a:r>
+                    </a:p>
+                  </a:txBody>
+                  <a:tcPr anchor="ctr" marL="109728" marR="91440" marT="36576" marB="36576">
+                    <a:solidFill>
+                      <a:srgbClr val="F2F2F2"/>
+                    </a:solidFill>
+                  </a:tcPr>
+                </a:tc>
+                <a:tc>
+                  <a:txBody>
+                    <a:bodyPr/>
+                    <a:lstStyle/>
+                    <a:p>
+                      <a:pPr algn="l"/>
+                      <a:r>
+                        <a:rPr sz="1100" b="0" i="0">
+                          <a:solidFill>
+                            <a:srgbClr val="2B2B2B"/>
+                          </a:solidFill>
+                          <a:latin typeface="Calibri"/>
+                        </a:rPr>
+                        <a:t>Sube el </a:t>
+                      </a:r>
+                      <a:r>
+                        <a:rPr sz="1100" b="1" i="0">
+                          <a:solidFill>
+                            <a:srgbClr val="2B2B2B"/>
+                          </a:solidFill>
+                          <a:latin typeface="Calibri"/>
+                        </a:rPr>
+                        <a:t>documento final</a:t>
+                      </a:r>
+                      <a:r>
+                        <a:rPr sz="1100" b="0" i="0">
+                          <a:solidFill>
+                            <a:srgbClr val="2B2B2B"/>
+                          </a:solidFill>
+                          <a:latin typeface="Calibri"/>
+                        </a:rPr>
+                        <a:t> en plantilla APA CUN: mínimo 4.000 palabras y 50 referencias.</a:t>
+                      </a:r>
+                    </a:p>
+                  </a:txBody>
+                  <a:tcPr anchor="ctr" marL="109728" marR="91440" marT="36576" marB="36576">
+                    <a:solidFill>
+                      <a:srgbClr val="F2F2F2"/>
+                    </a:solidFill>
+                  </a:tcPr>
+                </a:tc>
+              </a:tr>
+              <a:tr h="477520">
+                <a:tc>
+                  <a:txBody>
+                    <a:bodyPr/>
+                    <a:lstStyle/>
+                    <a:p>
+                      <a:pPr algn="l"/>
+                      <a:r>
+                        <a:rPr sz="1100" b="1" i="0">
+                          <a:solidFill>
+                            <a:srgbClr val="2B2B2B"/>
+                          </a:solidFill>
+                          <a:latin typeface="Calibri"/>
+                        </a:rPr>
+                        <a:t>Sesión 14</a:t>
+                      </a:r>
+                      <a:r>
+                        <a:rPr sz="1100" b="0" i="0">
+                          <a:solidFill>
+                            <a:srgbClr val="2B2B2B"/>
+                          </a:solidFill>
+                          <a:latin typeface="Calibri"/>
+                        </a:rPr>
+                        <a:t> · pendiente</a:t>
+                      </a:r>
+                    </a:p>
+                  </a:txBody>
+                  <a:tcPr anchor="ctr" marL="109728" marR="91440" marT="36576" marB="36576">
+                    <a:solidFill>
+                      <a:srgbClr val="FFFFFF"/>
+                    </a:solidFill>
+                  </a:tcPr>
+                </a:tc>
+                <a:tc>
+                  <a:txBody>
+                    <a:bodyPr/>
+                    <a:lstStyle/>
+                    <a:p>
+                      <a:pPr algn="l"/>
+                      <a:r>
+                        <a:rPr sz="1100" b="1" i="0">
+                          <a:solidFill>
+                            <a:srgbClr val="2B2B2B"/>
+                          </a:solidFill>
+                          <a:latin typeface="Calibri"/>
+                        </a:rPr>
+                        <a:t>Autoevaluación</a:t>
+                      </a:r>
+                      <a:r>
+                        <a:rPr sz="1100" b="0" i="0">
+                          <a:solidFill>
+                            <a:srgbClr val="2B2B2B"/>
+                          </a:solidFill>
+                          <a:latin typeface="Calibri"/>
+                        </a:rPr>
+                        <a:t> · Cuestionario · 2%</a:t>
+                      </a:r>
+                    </a:p>
+                  </a:txBody>
+                  <a:tcPr anchor="ctr" marL="109728" marR="91440" marT="36576" marB="36576">
+                    <a:solidFill>
+                      <a:srgbClr val="FFFFFF"/>
+                    </a:solidFill>
+                  </a:tcPr>
+                </a:tc>
+                <a:tc>
+                  <a:txBody>
+                    <a:bodyPr/>
+                    <a:lstStyle/>
+                    <a:p>
+                      <a:pPr algn="l"/>
+                      <a:r>
+                        <a:rPr sz="1100" b="0" i="0">
+                          <a:solidFill>
+                            <a:srgbClr val="2B2B2B"/>
+                          </a:solidFill>
+                          <a:latin typeface="Calibri"/>
+                        </a:rPr>
+                        <a:t>Diligénciala </a:t>
+                      </a:r>
+                      <a:r>
+                        <a:rPr sz="1100" b="1" i="0">
+                          <a:solidFill>
+                            <a:srgbClr val="2B2B2B"/>
+                          </a:solidFill>
+                          <a:latin typeface="Calibri"/>
+                        </a:rPr>
+                        <a:t>tú</a:t>
+                      </a:r>
+                      <a:r>
+                        <a:rPr sz="1100" b="0" i="0">
+                          <a:solidFill>
+                            <a:srgbClr val="2B2B2B"/>
+                          </a:solidFill>
+                          <a:latin typeface="Calibri"/>
+                        </a:rPr>
+                        <a:t>, dentro de su ventana, sobre tu participación real.</a:t>
+                      </a:r>
+                    </a:p>
+                  </a:txBody>
+                  <a:tcPr anchor="ctr" marL="109728" marR="91440" marT="36576" marB="36576">
+                    <a:solidFill>
+                      <a:srgbClr val="FFFFFF"/>
+                    </a:solidFill>
+                  </a:tcPr>
+                </a:tc>
+              </a:tr>
+              <a:tr h="477520">
+                <a:tc>
+                  <a:txBody>
+                    <a:bodyPr/>
+                    <a:lstStyle/>
+                    <a:p>
+                      <a:pPr algn="l"/>
+                      <a:r>
+                        <a:rPr sz="1100" b="1" i="0">
+                          <a:solidFill>
+                            <a:srgbClr val="2B2B2B"/>
+                          </a:solidFill>
+                          <a:latin typeface="Calibri"/>
+                        </a:rPr>
+                        <a:t>Sesión 14</a:t>
+                      </a:r>
+                      <a:r>
+                        <a:rPr sz="1100" b="0" i="0">
+                          <a:solidFill>
+                            <a:srgbClr val="2B2B2B"/>
+                          </a:solidFill>
+                          <a:latin typeface="Calibri"/>
+                        </a:rPr>
+                        <a:t> · pendiente</a:t>
+                      </a:r>
+                    </a:p>
+                  </a:txBody>
+                  <a:tcPr anchor="ctr" marL="109728" marR="91440" marT="36576" marB="36576">
+                    <a:solidFill>
+                      <a:srgbClr val="F2F2F2"/>
+                    </a:solidFill>
+                  </a:tcPr>
+                </a:tc>
+                <a:tc>
+                  <a:txBody>
+                    <a:bodyPr/>
+                    <a:lstStyle/>
+                    <a:p>
+                      <a:pPr algn="l"/>
+                      <a:r>
+                        <a:rPr sz="1100" b="1" i="0">
+                          <a:solidFill>
+                            <a:srgbClr val="2B2B2B"/>
+                          </a:solidFill>
+                          <a:latin typeface="Calibri"/>
+                        </a:rPr>
+                        <a:t>Coevaluación</a:t>
+                      </a:r>
+                      <a:r>
+                        <a:rPr sz="1100" b="0" i="0">
+                          <a:solidFill>
+                            <a:srgbClr val="2B2B2B"/>
+                          </a:solidFill>
+                          <a:latin typeface="Calibri"/>
+                        </a:rPr>
+                        <a:t> · Foro · 2%</a:t>
+                      </a:r>
+                    </a:p>
+                  </a:txBody>
+                  <a:tcPr anchor="ctr" marL="109728" marR="91440" marT="36576" marB="36576">
+                    <a:solidFill>
+                      <a:srgbClr val="F2F2F2"/>
+                    </a:solidFill>
+                  </a:tcPr>
+                </a:tc>
+                <a:tc>
+                  <a:txBody>
+                    <a:bodyPr/>
+                    <a:lstStyle/>
+                    <a:p>
+                      <a:pPr algn="l"/>
+                      <a:r>
+                        <a:rPr sz="1100" b="1" i="0">
+                          <a:solidFill>
+                            <a:srgbClr val="2B2B2B"/>
+                          </a:solidFill>
+                          <a:latin typeface="Calibri"/>
+                        </a:rPr>
+                        <a:t>Publica</a:t>
+                      </a:r>
+                      <a:r>
+                        <a:rPr sz="1100" b="0" i="0">
+                          <a:solidFill>
+                            <a:srgbClr val="2B2B2B"/>
+                          </a:solidFill>
+                          <a:latin typeface="Calibri"/>
+                        </a:rPr>
+                        <a:t> tu aporte dentro de la ventana: un borrador sin enviar no cuenta.</a:t>
+                      </a:r>
+                    </a:p>
+                  </a:txBody>
+                  <a:tcPr anchor="ctr" marL="109728" marR="91440" marT="36576" marB="36576">
+                    <a:solidFill>
+                      <a:srgbClr val="F2F2F2"/>
+                    </a:solidFill>
+                  </a:tcPr>
+                </a:tc>
+              </a:tr>
+            </a:tbl>
+          </a:graphicData>
+        </a:graphic>
+      </p:graphicFrame>
+      <p:sp>
+        <p:nvSpPr>
+          <p:cNvPr id="6" name="TextBox 5"/>
+          <p:cNvSpPr txBox="1"/>
+          <p:nvPr/>
+        </p:nvSpPr>
+        <p:spPr>
+          <a:xfrm>
+            <a:off x="640080" y="6080760"/>
+            <a:ext cx="10911535" cy="548640"/>
+          </a:xfrm>
+          <a:prstGeom prst="rect">
+            <a:avLst/>
+          </a:prstGeom>
+          <a:noFill/>
+        </p:spPr>
+        <p:txBody>
+          <a:bodyPr wrap="square" anchor="t" lIns="0" rIns="0" tIns="0" bIns="0">
+            <a:spAutoFit/>
+          </a:bodyPr>
+          <a:lstStyle/>
+          <a:p>
+            <a:r>
+              <a:rPr sz="1200" b="0" i="1">
+                <a:solidFill>
+                  <a:srgbClr val="2B2B2B"/>
+                </a:solidFill>
+                <a:latin typeface="Calibri"/>
+              </a:rPr>
+              <a:t>Esta misma tabla va al final de todas las sesiones. La </a:t>
+            </a:r>
+            <a:r>
+              <a:rPr sz="1200" b="1" i="1">
+                <a:solidFill>
+                  <a:srgbClr val="2B2B2B"/>
+                </a:solidFill>
+                <a:latin typeface="Calibri"/>
+              </a:rPr>
+              <a:t>fecha</a:t>
+            </a:r>
+            <a:r>
+              <a:rPr sz="1200" b="0" i="1">
+                <a:solidFill>
+                  <a:srgbClr val="2B2B2B"/>
+                </a:solidFill>
+                <a:latin typeface="Calibri"/>
+              </a:rPr>
+              <a:t> de cada ventana está en el enunciado del ítem (`Clases/Recursos/ACAs/`) y en el aula: si el aula y cualquier otro material se contradicen, </a:t>
+            </a:r>
+            <a:r>
+              <a:rPr sz="1200" b="1" i="1">
+                <a:solidFill>
+                  <a:srgbClr val="2B2B2B"/>
+                </a:solidFill>
+                <a:latin typeface="Calibri"/>
+              </a:rPr>
+              <a:t>manda el aula</a:t>
+            </a:r>
+            <a:r>
+              <a:rPr sz="1200" b="0" i="1">
+                <a:solidFill>
+                  <a:srgbClr val="2B2B2B"/>
+                </a:solidFill>
+                <a:latin typeface="Calibri"/>
+              </a:rPr>
+              <a:t>.</a:t>
+            </a:r>
+          </a:p>
+        </p:txBody>
+      </p:sp>
+      <p:sp>
+        <p:nvSpPr>
+          <p:cNvPr id="7" name="TextBox 6"/>
+          <p:cNvSpPr txBox="1"/>
+          <p:nvPr/>
+        </p:nvSpPr>
+        <p:spPr>
+          <a:xfrm>
+            <a:off x="11094415" y="6446520"/>
+            <a:ext cx="548640" cy="274320"/>
+          </a:xfrm>
+          <a:prstGeom prst="rect">
+            <a:avLst/>
+          </a:prstGeom>
+          <a:noFill/>
+        </p:spPr>
+        <p:txBody>
+          <a:bodyPr wrap="square" anchor="t" lIns="0" rIns="0" tIns="0" bIns="0">
+            <a:spAutoFit/>
+          </a:bodyPr>
+          <a:lstStyle/>
+          <a:p>
+            <a:pPr algn="r"/>
+            <a:r>
+              <a:rPr sz="1000" b="1" i="0">
+                <a:solidFill>
+                  <a:srgbClr val="8F989D"/>
+                </a:solidFill>
+                <a:latin typeface="Calibri"/>
+              </a:rPr>
+              <a:t>21</a:t>
+            </a:r>
+          </a:p>
+        </p:txBody>
+      </p:sp>
+    </p:spTree>
+  </p:cSld>
+  <p:clrMapOvr>
+    <a:masterClrMapping/>
+  </p:clrMapOvr>
+</p:sld>
+</file>
+
+<file path=ppt/slides/slide22.xml><?xml version="1.0" encoding="utf-8"?>
 <p:sld xmlns:a="http://schemas.openxmlformats.org/drawingml/2006/main" xmlns:p="http://schemas.openxmlformats.org/presentationml/2006/main" xmlns:r="http://schemas.openxmlformats.org/officeDocument/2006/relationships">
   <p:cSld>
     <p:bg>
@@ -8566,7 +10273,7 @@
                 </a:solidFill>
                 <a:latin typeface="Calibri"/>
               </a:rPr>
-              <a:t> — un tema común que a todos les importa. Aquí: investigar y escribir un artículo de grado.</a:t>
+              <a:t> — un tema común que a todos les importa. Aquí: investigar y escribir un documento de grado.</a:t>
             </a:r>
           </a:p>
           <a:p>
@@ -9261,7 +10968,7 @@
                           </a:solidFill>
                           <a:latin typeface="Calibri"/>
                         </a:rPr>
-                        <a:t>Cada uno escribe su artículo y declara qué se compartió</a:t>
+                        <a:t>Cada uno escribe su documento y declara qué se compartió</a:t>
                       </a:r>
                     </a:p>
                   </a:txBody>
